--- a/freiki-ui/assets/pptx-templates/DiakonieKorkBasis.pptx
+++ b/freiki-ui/assets/pptx-templates/DiakonieKorkBasis.pptx
@@ -479,7 +479,7 @@
 
 <file path=ppt/slideLayouts/slideLayout1.xml><?xml version="1.0" encoding="utf-8"?>
 <p:sldLayout xmlns:a="http://schemas.openxmlformats.org/drawingml/2006/main" xmlns:r="http://schemas.openxmlformats.org/officeDocument/2006/relationships" xmlns:p="http://schemas.openxmlformats.org/presentationml/2006/main" showMasterSp="0" type="tx">
-  <p:cSld name="Title Slide">
+  <p:cSld name="Titelfolie">
     <p:spTree>
       <p:nvGrpSpPr>
         <p:cNvPr id="1" name=""/>
@@ -607,2835 +607,59 @@
         </p:nvSpPr>
         <p:spPr>
           <a:xfrm>
-            <a:off x="923883" y="2012401"/>
-            <a:ext cx="11596089" cy="4796281"/>
+            <a:off x="923883" y="2296900"/>
+            <a:ext cx="11596089" cy="4511782"/>
           </a:xfrm>
           <a:prstGeom prst="rect">
             <a:avLst/>
           </a:prstGeom>
         </p:spPr>
         <p:txBody>
-          <a:bodyPr lIns="0" tIns="0" rIns="0" bIns="0" anchor="ctr">
+          <a:bodyPr lIns="0" tIns="0" rIns="0" bIns="0" anchor="t">
             <a:normAutofit/>
           </a:bodyPr>
           <a:lstStyle/>
           <a:p>
+            <a:pPr lvl="0"/>
             <a:r>
-              <a:rPr dirty="0" err="1"/>
-              <a:t>Textebene</a:t>
-            </a:r>
-            <a:r>
-              <a:rPr dirty="0"/>
-              <a:t> 1</a:t>
+              <a:rPr lang="de-DE" dirty="0"/>
+              <a:t>Mastertextformat bearbeiten</a:t>
             </a:r>
           </a:p>
           <a:p>
             <a:pPr lvl="1"/>
             <a:r>
-              <a:rPr dirty="0" err="1"/>
-              <a:t>Textebene</a:t>
-            </a:r>
-            <a:r>
-              <a:rPr dirty="0"/>
-              <a:t> 2</a:t>
+              <a:rPr lang="de-DE" dirty="0"/>
+              <a:t>Zweite Ebene</a:t>
             </a:r>
           </a:p>
           <a:p>
             <a:pPr lvl="2"/>
             <a:r>
-              <a:rPr dirty="0" err="1"/>
-              <a:t>Textebene</a:t>
-            </a:r>
-            <a:r>
-              <a:rPr dirty="0"/>
-              <a:t> 3</a:t>
+              <a:rPr lang="de-DE" dirty="0"/>
+              <a:t>Dritte Ebene</a:t>
             </a:r>
           </a:p>
           <a:p>
             <a:pPr lvl="3"/>
             <a:r>
-              <a:rPr dirty="0" err="1"/>
-              <a:t>Textebene</a:t>
-            </a:r>
-            <a:r>
-              <a:rPr dirty="0"/>
-              <a:t> 4</a:t>
+              <a:rPr lang="de-DE" dirty="0"/>
+              <a:t>Vierte Ebene</a:t>
             </a:r>
           </a:p>
           <a:p>
             <a:pPr lvl="4"/>
             <a:r>
-              <a:rPr dirty="0" err="1"/>
-              <a:t>Textebene</a:t>
+              <a:rPr lang="de-DE" dirty="0"/>
+              <a:t>Fünfte Ebene</a:t>
             </a:r>
-            <a:r>
-              <a:rPr dirty="0"/>
-              <a:t> 5</a:t>
-            </a:r>
+            <a:endParaRPr dirty="0"/>
           </a:p>
         </p:txBody>
       </p:sp>
       <p:sp>
         <p:nvSpPr>
           <p:cNvPr id="24" name="Foliennummer"/>
-          <p:cNvSpPr txBox="1">
-            <a:spLocks noGrp="1"/>
-          </p:cNvSpPr>
-          <p:nvPr>
-            <p:ph type="sldNum" sz="quarter" idx="2"/>
-          </p:nvPr>
-        </p:nvSpPr>
-        <p:spPr>
-          <a:prstGeom prst="rect">
-            <a:avLst/>
-          </a:prstGeom>
-        </p:spPr>
-        <p:txBody>
-          <a:bodyPr/>
-          <a:lstStyle/>
-          <a:p>
-            <a:fld id="{86CB4B4D-7CA3-9044-876B-883B54F8677D}" type="slidenum">
-              <a:t>‹Nr.›</a:t>
-            </a:fld>
-            <a:endParaRPr/>
-          </a:p>
-        </p:txBody>
-      </p:sp>
-    </p:spTree>
-  </p:cSld>
-  <p:clrMapOvr>
-    <a:masterClrMapping/>
-  </p:clrMapOvr>
-  <p:transition spd="med"/>
-</p:sldLayout>
-</file>
-
-<file path=ppt/slideLayouts/slideLayout10.xml><?xml version="1.0" encoding="utf-8"?>
-<p:sldLayout xmlns:a="http://schemas.openxmlformats.org/drawingml/2006/main" xmlns:r="http://schemas.openxmlformats.org/officeDocument/2006/relationships" xmlns:p="http://schemas.openxmlformats.org/presentationml/2006/main" showMasterSp="0" type="tx">
-  <p:cSld name="Title, 6 Content">
-    <p:spTree>
-      <p:nvGrpSpPr>
-        <p:cNvPr id="1" name=""/>
-        <p:cNvGrpSpPr/>
-        <p:nvPr/>
-      </p:nvGrpSpPr>
-      <p:grpSpPr>
-        <a:xfrm>
-          <a:off x="0" y="0"/>
-          <a:ext cx="0" cy="0"/>
-          <a:chOff x="0" y="0"/>
-          <a:chExt cx="0" cy="0"/>
-        </a:xfrm>
-      </p:grpSpPr>
-      <p:sp>
-        <p:nvSpPr>
-          <p:cNvPr id="128" name="Rechteck 7"/>
-          <p:cNvSpPr/>
-          <p:nvPr/>
-        </p:nvSpPr>
-        <p:spPr>
-          <a:xfrm>
-            <a:off x="0" y="5259600"/>
-            <a:ext cx="13444816" cy="2299681"/>
-          </a:xfrm>
-          <a:prstGeom prst="rect">
-            <a:avLst/>
-          </a:prstGeom>
-          <a:gradFill>
-            <a:gsLst>
-              <a:gs pos="0">
-                <a:srgbClr val="FFDB89"/>
-              </a:gs>
-              <a:gs pos="100000">
-                <a:srgbClr val="FFFFFF"/>
-              </a:gs>
-            </a:gsLst>
-            <a:lin ang="16200000"/>
-          </a:gradFill>
-          <a:ln w="12700">
-            <a:miter lim="400000"/>
-          </a:ln>
-        </p:spPr>
-        <p:txBody>
-          <a:bodyPr lIns="0" tIns="0" rIns="0" bIns="0"/>
-          <a:lstStyle/>
-          <a:p>
-            <a:endParaRPr sz="1800"/>
-          </a:p>
-        </p:txBody>
-      </p:sp>
-      <p:pic>
-        <p:nvPicPr>
-          <p:cNvPr id="129" name="Grafik 9" descr="Grafik 9"/>
-          <p:cNvPicPr>
-            <a:picLocks noChangeAspect="1"/>
-          </p:cNvPicPr>
-          <p:nvPr/>
-        </p:nvPicPr>
-        <p:blipFill>
-          <a:blip r:embed="rId2"/>
-          <a:stretch>
-            <a:fillRect/>
-          </a:stretch>
-        </p:blipFill>
-        <p:spPr>
-          <a:xfrm>
-            <a:off x="9123595" y="257040"/>
-            <a:ext cx="4127707" cy="1568520"/>
-          </a:xfrm>
-          <a:prstGeom prst="rect">
-            <a:avLst/>
-          </a:prstGeom>
-          <a:ln w="12700">
-            <a:miter lim="400000"/>
-          </a:ln>
-        </p:spPr>
-      </p:pic>
-      <p:sp>
-        <p:nvSpPr>
-          <p:cNvPr id="130" name="Titeltext"/>
-          <p:cNvSpPr txBox="1">
-            <a:spLocks noGrp="1"/>
-          </p:cNvSpPr>
-          <p:nvPr>
-            <p:ph type="title"/>
-          </p:nvPr>
-        </p:nvSpPr>
-        <p:spPr>
-          <a:xfrm>
-            <a:off x="923883" y="402120"/>
-            <a:ext cx="11596089" cy="1460881"/>
-          </a:xfrm>
-          <a:prstGeom prst="rect">
-            <a:avLst/>
-          </a:prstGeom>
-        </p:spPr>
-        <p:txBody>
-          <a:bodyPr lIns="0" tIns="0" rIns="0" bIns="0">
-            <a:normAutofit/>
-          </a:bodyPr>
-          <a:lstStyle/>
-          <a:p>
-            <a:r>
-              <a:t>Titeltext</a:t>
-            </a:r>
-          </a:p>
-        </p:txBody>
-      </p:sp>
-      <p:sp>
-        <p:nvSpPr>
-          <p:cNvPr id="131" name="Textebene 1…"/>
-          <p:cNvSpPr txBox="1">
-            <a:spLocks noGrp="1"/>
-          </p:cNvSpPr>
-          <p:nvPr>
-            <p:ph type="body" sz="quarter" idx="1"/>
-          </p:nvPr>
-        </p:nvSpPr>
-        <p:spPr>
-          <a:xfrm>
-            <a:off x="923883" y="2012401"/>
-            <a:ext cx="3733473" cy="2287801"/>
-          </a:xfrm>
-          <a:prstGeom prst="rect">
-            <a:avLst/>
-          </a:prstGeom>
-        </p:spPr>
-        <p:txBody>
-          <a:bodyPr lIns="0" tIns="0" rIns="0" bIns="0">
-            <a:normAutofit/>
-          </a:bodyPr>
-          <a:lstStyle/>
-          <a:p>
-            <a:r>
-              <a:t>Textebene 1</a:t>
-            </a:r>
-          </a:p>
-          <a:p>
-            <a:pPr lvl="1"/>
-            <a:r>
-              <a:t>Textebene 2</a:t>
-            </a:r>
-          </a:p>
-          <a:p>
-            <a:pPr lvl="2"/>
-            <a:r>
-              <a:t>Textebene 3</a:t>
-            </a:r>
-          </a:p>
-          <a:p>
-            <a:pPr lvl="3"/>
-            <a:r>
-              <a:t>Textebene 4</a:t>
-            </a:r>
-          </a:p>
-          <a:p>
-            <a:pPr lvl="4"/>
-            <a:r>
-              <a:t>Textebene 5</a:t>
-            </a:r>
-          </a:p>
-        </p:txBody>
-      </p:sp>
-      <p:sp>
-        <p:nvSpPr>
-          <p:cNvPr id="132" name="Foliennummer"/>
-          <p:cNvSpPr txBox="1">
-            <a:spLocks noGrp="1"/>
-          </p:cNvSpPr>
-          <p:nvPr>
-            <p:ph type="sldNum" sz="quarter" idx="2"/>
-          </p:nvPr>
-        </p:nvSpPr>
-        <p:spPr>
-          <a:prstGeom prst="rect">
-            <a:avLst/>
-          </a:prstGeom>
-        </p:spPr>
-        <p:txBody>
-          <a:bodyPr/>
-          <a:lstStyle/>
-          <a:p>
-            <a:fld id="{86CB4B4D-7CA3-9044-876B-883B54F8677D}" type="slidenum">
-              <a:t>‹Nr.›</a:t>
-            </a:fld>
-            <a:endParaRPr/>
-          </a:p>
-        </p:txBody>
-      </p:sp>
-    </p:spTree>
-  </p:cSld>
-  <p:clrMapOvr>
-    <a:masterClrMapping/>
-  </p:clrMapOvr>
-  <p:transition spd="med"/>
-</p:sldLayout>
-</file>
-
-<file path=ppt/slideLayouts/slideLayout11.xml><?xml version="1.0" encoding="utf-8"?>
-<p:sldLayout xmlns:a="http://schemas.openxmlformats.org/drawingml/2006/main" xmlns:r="http://schemas.openxmlformats.org/officeDocument/2006/relationships" xmlns:p="http://schemas.openxmlformats.org/presentationml/2006/main" showMasterSp="0" type="tx">
-  <p:cSld name="Title Slide">
-    <p:spTree>
-      <p:nvGrpSpPr>
-        <p:cNvPr id="1" name=""/>
-        <p:cNvGrpSpPr/>
-        <p:nvPr/>
-      </p:nvGrpSpPr>
-      <p:grpSpPr>
-        <a:xfrm>
-          <a:off x="0" y="0"/>
-          <a:ext cx="0" cy="0"/>
-          <a:chOff x="0" y="0"/>
-          <a:chExt cx="0" cy="0"/>
-        </a:xfrm>
-      </p:grpSpPr>
-      <p:sp>
-        <p:nvSpPr>
-          <p:cNvPr id="148" name="Rechteck 7"/>
-          <p:cNvSpPr/>
-          <p:nvPr/>
-        </p:nvSpPr>
-        <p:spPr>
-          <a:xfrm>
-            <a:off x="0" y="5259600"/>
-            <a:ext cx="13444816" cy="2299681"/>
-          </a:xfrm>
-          <a:prstGeom prst="rect">
-            <a:avLst/>
-          </a:prstGeom>
-          <a:gradFill>
-            <a:gsLst>
-              <a:gs pos="0">
-                <a:srgbClr val="FFDB89"/>
-              </a:gs>
-              <a:gs pos="100000">
-                <a:srgbClr val="FFFFFF"/>
-              </a:gs>
-            </a:gsLst>
-            <a:lin ang="16200000"/>
-          </a:gradFill>
-          <a:ln w="12700">
-            <a:miter lim="400000"/>
-          </a:ln>
-        </p:spPr>
-        <p:txBody>
-          <a:bodyPr lIns="0" tIns="0" rIns="0" bIns="0"/>
-          <a:lstStyle/>
-          <a:p>
-            <a:endParaRPr sz="1800"/>
-          </a:p>
-        </p:txBody>
-      </p:sp>
-      <p:pic>
-        <p:nvPicPr>
-          <p:cNvPr id="149" name="Grafik 9" descr="Grafik 9"/>
-          <p:cNvPicPr>
-            <a:picLocks noChangeAspect="1"/>
-          </p:cNvPicPr>
-          <p:nvPr/>
-        </p:nvPicPr>
-        <p:blipFill>
-          <a:blip r:embed="rId2"/>
-          <a:stretch>
-            <a:fillRect/>
-          </a:stretch>
-        </p:blipFill>
-        <p:spPr>
-          <a:xfrm>
-            <a:off x="9123595" y="256680"/>
-            <a:ext cx="4127707" cy="1568521"/>
-          </a:xfrm>
-          <a:prstGeom prst="rect">
-            <a:avLst/>
-          </a:prstGeom>
-          <a:ln w="12700">
-            <a:miter lim="400000"/>
-          </a:ln>
-        </p:spPr>
-      </p:pic>
-      <p:sp>
-        <p:nvSpPr>
-          <p:cNvPr id="150" name="Titeltext"/>
-          <p:cNvSpPr txBox="1">
-            <a:spLocks noGrp="1"/>
-          </p:cNvSpPr>
-          <p:nvPr>
-            <p:ph type="title"/>
-          </p:nvPr>
-        </p:nvSpPr>
-        <p:spPr>
-          <a:xfrm>
-            <a:off x="923883" y="402120"/>
-            <a:ext cx="11596089" cy="1460881"/>
-          </a:xfrm>
-          <a:prstGeom prst="rect">
-            <a:avLst/>
-          </a:prstGeom>
-        </p:spPr>
-        <p:txBody>
-          <a:bodyPr lIns="0" tIns="0" rIns="0" bIns="0">
-            <a:normAutofit/>
-          </a:bodyPr>
-          <a:lstStyle>
-            <a:lvl1pPr>
-              <a:lnSpc>
-                <a:spcPct val="100000"/>
-              </a:lnSpc>
-              <a:defRPr sz="1800" spc="0">
-                <a:latin typeface="+mn-lt"/>
-                <a:ea typeface="+mn-ea"/>
-                <a:cs typeface="+mn-cs"/>
-                <a:sym typeface="Helvetica"/>
-              </a:defRPr>
-            </a:lvl1pPr>
-          </a:lstStyle>
-          <a:p>
-            <a:r>
-              <a:t>Titeltext</a:t>
-            </a:r>
-          </a:p>
-        </p:txBody>
-      </p:sp>
-      <p:sp>
-        <p:nvSpPr>
-          <p:cNvPr id="151" name="Textebene 1…"/>
-          <p:cNvSpPr txBox="1">
-            <a:spLocks noGrp="1"/>
-          </p:cNvSpPr>
-          <p:nvPr>
-            <p:ph type="body" idx="1"/>
-          </p:nvPr>
-        </p:nvSpPr>
-        <p:spPr>
-          <a:xfrm>
-            <a:off x="923883" y="2012401"/>
-            <a:ext cx="11596089" cy="4796281"/>
-          </a:xfrm>
-          <a:prstGeom prst="rect">
-            <a:avLst/>
-          </a:prstGeom>
-        </p:spPr>
-        <p:txBody>
-          <a:bodyPr lIns="0" tIns="0" rIns="0" bIns="0" anchor="ctr">
-            <a:normAutofit/>
-          </a:bodyPr>
-          <a:lstStyle>
-            <a:lvl1pPr marL="0" indent="0">
-              <a:lnSpc>
-                <a:spcPct val="100000"/>
-              </a:lnSpc>
-              <a:spcBef>
-                <a:spcPts val="0"/>
-              </a:spcBef>
-              <a:buClrTx/>
-              <a:buSzTx/>
-              <a:buFontTx/>
-              <a:buNone/>
-              <a:defRPr sz="1800" spc="0">
-                <a:latin typeface="+mn-lt"/>
-                <a:ea typeface="+mn-ea"/>
-                <a:cs typeface="+mn-cs"/>
-                <a:sym typeface="Helvetica"/>
-              </a:defRPr>
-            </a:lvl1pPr>
-            <a:lvl2pPr marL="0" indent="0">
-              <a:lnSpc>
-                <a:spcPct val="100000"/>
-              </a:lnSpc>
-              <a:spcBef>
-                <a:spcPts val="0"/>
-              </a:spcBef>
-              <a:buClrTx/>
-              <a:buSzTx/>
-              <a:buFontTx/>
-              <a:buNone/>
-              <a:defRPr sz="1800" spc="0">
-                <a:latin typeface="+mn-lt"/>
-                <a:ea typeface="+mn-ea"/>
-                <a:cs typeface="+mn-cs"/>
-                <a:sym typeface="Helvetica"/>
-              </a:defRPr>
-            </a:lvl2pPr>
-            <a:lvl3pPr marL="0" indent="0">
-              <a:lnSpc>
-                <a:spcPct val="100000"/>
-              </a:lnSpc>
-              <a:spcBef>
-                <a:spcPts val="0"/>
-              </a:spcBef>
-              <a:buClrTx/>
-              <a:buSzTx/>
-              <a:buFontTx/>
-              <a:buNone/>
-              <a:defRPr sz="1800" spc="0">
-                <a:latin typeface="+mn-lt"/>
-                <a:ea typeface="+mn-ea"/>
-                <a:cs typeface="+mn-cs"/>
-                <a:sym typeface="Helvetica"/>
-              </a:defRPr>
-            </a:lvl3pPr>
-            <a:lvl4pPr marL="0" indent="0">
-              <a:lnSpc>
-                <a:spcPct val="100000"/>
-              </a:lnSpc>
-              <a:spcBef>
-                <a:spcPts val="0"/>
-              </a:spcBef>
-              <a:buClrTx/>
-              <a:buSzTx/>
-              <a:buFontTx/>
-              <a:buNone/>
-              <a:defRPr sz="1800" spc="0">
-                <a:latin typeface="+mn-lt"/>
-                <a:ea typeface="+mn-ea"/>
-                <a:cs typeface="+mn-cs"/>
-                <a:sym typeface="Helvetica"/>
-              </a:defRPr>
-            </a:lvl4pPr>
-            <a:lvl5pPr marL="0" indent="0">
-              <a:lnSpc>
-                <a:spcPct val="100000"/>
-              </a:lnSpc>
-              <a:spcBef>
-                <a:spcPts val="0"/>
-              </a:spcBef>
-              <a:buClrTx/>
-              <a:buSzTx/>
-              <a:buFontTx/>
-              <a:buNone/>
-              <a:defRPr sz="1800" spc="0">
-                <a:latin typeface="+mn-lt"/>
-                <a:ea typeface="+mn-ea"/>
-                <a:cs typeface="+mn-cs"/>
-                <a:sym typeface="Helvetica"/>
-              </a:defRPr>
-            </a:lvl5pPr>
-          </a:lstStyle>
-          <a:p>
-            <a:r>
-              <a:t>Textebene 1</a:t>
-            </a:r>
-          </a:p>
-          <a:p>
-            <a:pPr lvl="1"/>
-            <a:r>
-              <a:t>Textebene 2</a:t>
-            </a:r>
-          </a:p>
-          <a:p>
-            <a:pPr lvl="2"/>
-            <a:r>
-              <a:t>Textebene 3</a:t>
-            </a:r>
-          </a:p>
-          <a:p>
-            <a:pPr lvl="3"/>
-            <a:r>
-              <a:t>Textebene 4</a:t>
-            </a:r>
-          </a:p>
-          <a:p>
-            <a:pPr lvl="4"/>
-            <a:r>
-              <a:t>Textebene 5</a:t>
-            </a:r>
-          </a:p>
-        </p:txBody>
-      </p:sp>
-      <p:sp>
-        <p:nvSpPr>
-          <p:cNvPr id="152" name="Foliennummer"/>
-          <p:cNvSpPr txBox="1">
-            <a:spLocks noGrp="1"/>
-          </p:cNvSpPr>
-          <p:nvPr>
-            <p:ph type="sldNum" sz="quarter" idx="2"/>
-          </p:nvPr>
-        </p:nvSpPr>
-        <p:spPr>
-          <a:prstGeom prst="rect">
-            <a:avLst/>
-          </a:prstGeom>
-        </p:spPr>
-        <p:txBody>
-          <a:bodyPr/>
-          <a:lstStyle/>
-          <a:p>
-            <a:fld id="{86CB4B4D-7CA3-9044-876B-883B54F8677D}" type="slidenum">
-              <a:t>‹Nr.›</a:t>
-            </a:fld>
-            <a:endParaRPr/>
-          </a:p>
-        </p:txBody>
-      </p:sp>
-    </p:spTree>
-  </p:cSld>
-  <p:clrMapOvr>
-    <a:masterClrMapping/>
-  </p:clrMapOvr>
-  <p:transition spd="med"/>
-</p:sldLayout>
-</file>
-
-<file path=ppt/slideLayouts/slideLayout12.xml><?xml version="1.0" encoding="utf-8"?>
-<p:sldLayout xmlns:a="http://schemas.openxmlformats.org/drawingml/2006/main" xmlns:r="http://schemas.openxmlformats.org/officeDocument/2006/relationships" xmlns:p="http://schemas.openxmlformats.org/presentationml/2006/main" showMasterSp="0" type="tx">
-  <p:cSld name="Title, Content">
-    <p:spTree>
-      <p:nvGrpSpPr>
-        <p:cNvPr id="1" name=""/>
-        <p:cNvGrpSpPr/>
-        <p:nvPr/>
-      </p:nvGrpSpPr>
-      <p:grpSpPr>
-        <a:xfrm>
-          <a:off x="0" y="0"/>
-          <a:ext cx="0" cy="0"/>
-          <a:chOff x="0" y="0"/>
-          <a:chExt cx="0" cy="0"/>
-        </a:xfrm>
-      </p:grpSpPr>
-      <p:sp>
-        <p:nvSpPr>
-          <p:cNvPr id="159" name="Rechteck 7"/>
-          <p:cNvSpPr/>
-          <p:nvPr/>
-        </p:nvSpPr>
-        <p:spPr>
-          <a:xfrm>
-            <a:off x="0" y="5259600"/>
-            <a:ext cx="13444816" cy="2299681"/>
-          </a:xfrm>
-          <a:prstGeom prst="rect">
-            <a:avLst/>
-          </a:prstGeom>
-          <a:gradFill>
-            <a:gsLst>
-              <a:gs pos="0">
-                <a:srgbClr val="FFDB89"/>
-              </a:gs>
-              <a:gs pos="100000">
-                <a:srgbClr val="FFFFFF"/>
-              </a:gs>
-            </a:gsLst>
-            <a:lin ang="16200000"/>
-          </a:gradFill>
-          <a:ln w="12700">
-            <a:miter lim="400000"/>
-          </a:ln>
-        </p:spPr>
-        <p:txBody>
-          <a:bodyPr lIns="0" tIns="0" rIns="0" bIns="0"/>
-          <a:lstStyle/>
-          <a:p>
-            <a:endParaRPr sz="1800"/>
-          </a:p>
-        </p:txBody>
-      </p:sp>
-      <p:pic>
-        <p:nvPicPr>
-          <p:cNvPr id="160" name="Grafik 9" descr="Grafik 9"/>
-          <p:cNvPicPr>
-            <a:picLocks noChangeAspect="1"/>
-          </p:cNvPicPr>
-          <p:nvPr/>
-        </p:nvPicPr>
-        <p:blipFill>
-          <a:blip r:embed="rId2"/>
-          <a:stretch>
-            <a:fillRect/>
-          </a:stretch>
-        </p:blipFill>
-        <p:spPr>
-          <a:xfrm>
-            <a:off x="9123595" y="256680"/>
-            <a:ext cx="4127707" cy="1568521"/>
-          </a:xfrm>
-          <a:prstGeom prst="rect">
-            <a:avLst/>
-          </a:prstGeom>
-          <a:ln w="12700">
-            <a:miter lim="400000"/>
-          </a:ln>
-        </p:spPr>
-      </p:pic>
-      <p:sp>
-        <p:nvSpPr>
-          <p:cNvPr id="161" name="Titeltext"/>
-          <p:cNvSpPr txBox="1">
-            <a:spLocks noGrp="1"/>
-          </p:cNvSpPr>
-          <p:nvPr>
-            <p:ph type="title"/>
-          </p:nvPr>
-        </p:nvSpPr>
-        <p:spPr>
-          <a:xfrm>
-            <a:off x="923883" y="402120"/>
-            <a:ext cx="11596089" cy="1460881"/>
-          </a:xfrm>
-          <a:prstGeom prst="rect">
-            <a:avLst/>
-          </a:prstGeom>
-        </p:spPr>
-        <p:txBody>
-          <a:bodyPr lIns="0" tIns="0" rIns="0" bIns="0">
-            <a:normAutofit/>
-          </a:bodyPr>
-          <a:lstStyle>
-            <a:lvl1pPr>
-              <a:lnSpc>
-                <a:spcPct val="100000"/>
-              </a:lnSpc>
-              <a:defRPr sz="1800" spc="0">
-                <a:latin typeface="+mn-lt"/>
-                <a:ea typeface="+mn-ea"/>
-                <a:cs typeface="+mn-cs"/>
-                <a:sym typeface="Helvetica"/>
-              </a:defRPr>
-            </a:lvl1pPr>
-          </a:lstStyle>
-          <a:p>
-            <a:r>
-              <a:t>Titeltext</a:t>
-            </a:r>
-          </a:p>
-        </p:txBody>
-      </p:sp>
-      <p:sp>
-        <p:nvSpPr>
-          <p:cNvPr id="162" name="Textebene 1…"/>
-          <p:cNvSpPr txBox="1">
-            <a:spLocks noGrp="1"/>
-          </p:cNvSpPr>
-          <p:nvPr>
-            <p:ph type="body" idx="1"/>
-          </p:nvPr>
-        </p:nvSpPr>
-        <p:spPr>
-          <a:xfrm>
-            <a:off x="923883" y="2012401"/>
-            <a:ext cx="11596089" cy="4796281"/>
-          </a:xfrm>
-          <a:prstGeom prst="rect">
-            <a:avLst/>
-          </a:prstGeom>
-        </p:spPr>
-        <p:txBody>
-          <a:bodyPr lIns="0" tIns="0" rIns="0" bIns="0">
-            <a:normAutofit/>
-          </a:bodyPr>
-          <a:lstStyle>
-            <a:lvl1pPr marL="0" indent="0">
-              <a:lnSpc>
-                <a:spcPct val="100000"/>
-              </a:lnSpc>
-              <a:spcBef>
-                <a:spcPts val="0"/>
-              </a:spcBef>
-              <a:buClrTx/>
-              <a:buSzTx/>
-              <a:buFontTx/>
-              <a:buNone/>
-              <a:defRPr sz="1800" spc="0">
-                <a:latin typeface="+mn-lt"/>
-                <a:ea typeface="+mn-ea"/>
-                <a:cs typeface="+mn-cs"/>
-                <a:sym typeface="Helvetica"/>
-              </a:defRPr>
-            </a:lvl1pPr>
-            <a:lvl2pPr marL="0" indent="0">
-              <a:lnSpc>
-                <a:spcPct val="100000"/>
-              </a:lnSpc>
-              <a:spcBef>
-                <a:spcPts val="0"/>
-              </a:spcBef>
-              <a:buClrTx/>
-              <a:buSzTx/>
-              <a:buFontTx/>
-              <a:buNone/>
-              <a:defRPr sz="1800" spc="0">
-                <a:latin typeface="+mn-lt"/>
-                <a:ea typeface="+mn-ea"/>
-                <a:cs typeface="+mn-cs"/>
-                <a:sym typeface="Helvetica"/>
-              </a:defRPr>
-            </a:lvl2pPr>
-            <a:lvl3pPr marL="0" indent="0">
-              <a:lnSpc>
-                <a:spcPct val="100000"/>
-              </a:lnSpc>
-              <a:spcBef>
-                <a:spcPts val="0"/>
-              </a:spcBef>
-              <a:buClrTx/>
-              <a:buSzTx/>
-              <a:buFontTx/>
-              <a:buNone/>
-              <a:defRPr sz="1800" spc="0">
-                <a:latin typeface="+mn-lt"/>
-                <a:ea typeface="+mn-ea"/>
-                <a:cs typeface="+mn-cs"/>
-                <a:sym typeface="Helvetica"/>
-              </a:defRPr>
-            </a:lvl3pPr>
-            <a:lvl4pPr marL="0" indent="0">
-              <a:lnSpc>
-                <a:spcPct val="100000"/>
-              </a:lnSpc>
-              <a:spcBef>
-                <a:spcPts val="0"/>
-              </a:spcBef>
-              <a:buClrTx/>
-              <a:buSzTx/>
-              <a:buFontTx/>
-              <a:buNone/>
-              <a:defRPr sz="1800" spc="0">
-                <a:latin typeface="+mn-lt"/>
-                <a:ea typeface="+mn-ea"/>
-                <a:cs typeface="+mn-cs"/>
-                <a:sym typeface="Helvetica"/>
-              </a:defRPr>
-            </a:lvl4pPr>
-            <a:lvl5pPr marL="0" indent="0">
-              <a:lnSpc>
-                <a:spcPct val="100000"/>
-              </a:lnSpc>
-              <a:spcBef>
-                <a:spcPts val="0"/>
-              </a:spcBef>
-              <a:buClrTx/>
-              <a:buSzTx/>
-              <a:buFontTx/>
-              <a:buNone/>
-              <a:defRPr sz="1800" spc="0">
-                <a:latin typeface="+mn-lt"/>
-                <a:ea typeface="+mn-ea"/>
-                <a:cs typeface="+mn-cs"/>
-                <a:sym typeface="Helvetica"/>
-              </a:defRPr>
-            </a:lvl5pPr>
-          </a:lstStyle>
-          <a:p>
-            <a:r>
-              <a:t>Textebene 1</a:t>
-            </a:r>
-          </a:p>
-          <a:p>
-            <a:pPr lvl="1"/>
-            <a:r>
-              <a:t>Textebene 2</a:t>
-            </a:r>
-          </a:p>
-          <a:p>
-            <a:pPr lvl="2"/>
-            <a:r>
-              <a:t>Textebene 3</a:t>
-            </a:r>
-          </a:p>
-          <a:p>
-            <a:pPr lvl="3"/>
-            <a:r>
-              <a:t>Textebene 4</a:t>
-            </a:r>
-          </a:p>
-          <a:p>
-            <a:pPr lvl="4"/>
-            <a:r>
-              <a:t>Textebene 5</a:t>
-            </a:r>
-          </a:p>
-        </p:txBody>
-      </p:sp>
-      <p:sp>
-        <p:nvSpPr>
-          <p:cNvPr id="163" name="Foliennummer"/>
-          <p:cNvSpPr txBox="1">
-            <a:spLocks noGrp="1"/>
-          </p:cNvSpPr>
-          <p:nvPr>
-            <p:ph type="sldNum" sz="quarter" idx="2"/>
-          </p:nvPr>
-        </p:nvSpPr>
-        <p:spPr>
-          <a:prstGeom prst="rect">
-            <a:avLst/>
-          </a:prstGeom>
-        </p:spPr>
-        <p:txBody>
-          <a:bodyPr/>
-          <a:lstStyle/>
-          <a:p>
-            <a:fld id="{86CB4B4D-7CA3-9044-876B-883B54F8677D}" type="slidenum">
-              <a:t>‹Nr.›</a:t>
-            </a:fld>
-            <a:endParaRPr/>
-          </a:p>
-        </p:txBody>
-      </p:sp>
-    </p:spTree>
-  </p:cSld>
-  <p:clrMapOvr>
-    <a:masterClrMapping/>
-  </p:clrMapOvr>
-  <p:transition spd="med"/>
-</p:sldLayout>
-</file>
-
-<file path=ppt/slideLayouts/slideLayout13.xml><?xml version="1.0" encoding="utf-8"?>
-<p:sldLayout xmlns:a="http://schemas.openxmlformats.org/drawingml/2006/main" xmlns:r="http://schemas.openxmlformats.org/officeDocument/2006/relationships" xmlns:p="http://schemas.openxmlformats.org/presentationml/2006/main" showMasterSp="0" type="tx">
-  <p:cSld name="Title, 2 Content">
-    <p:spTree>
-      <p:nvGrpSpPr>
-        <p:cNvPr id="1" name=""/>
-        <p:cNvGrpSpPr/>
-        <p:nvPr/>
-      </p:nvGrpSpPr>
-      <p:grpSpPr>
-        <a:xfrm>
-          <a:off x="0" y="0"/>
-          <a:ext cx="0" cy="0"/>
-          <a:chOff x="0" y="0"/>
-          <a:chExt cx="0" cy="0"/>
-        </a:xfrm>
-      </p:grpSpPr>
-      <p:sp>
-        <p:nvSpPr>
-          <p:cNvPr id="170" name="Rechteck 7"/>
-          <p:cNvSpPr/>
-          <p:nvPr/>
-        </p:nvSpPr>
-        <p:spPr>
-          <a:xfrm>
-            <a:off x="0" y="5259600"/>
-            <a:ext cx="13444816" cy="2299681"/>
-          </a:xfrm>
-          <a:prstGeom prst="rect">
-            <a:avLst/>
-          </a:prstGeom>
-          <a:gradFill>
-            <a:gsLst>
-              <a:gs pos="0">
-                <a:srgbClr val="FFDB89"/>
-              </a:gs>
-              <a:gs pos="100000">
-                <a:srgbClr val="FFFFFF"/>
-              </a:gs>
-            </a:gsLst>
-            <a:lin ang="16200000"/>
-          </a:gradFill>
-          <a:ln w="12700">
-            <a:miter lim="400000"/>
-          </a:ln>
-        </p:spPr>
-        <p:txBody>
-          <a:bodyPr lIns="0" tIns="0" rIns="0" bIns="0"/>
-          <a:lstStyle/>
-          <a:p>
-            <a:endParaRPr sz="1800"/>
-          </a:p>
-        </p:txBody>
-      </p:sp>
-      <p:pic>
-        <p:nvPicPr>
-          <p:cNvPr id="171" name="Grafik 9" descr="Grafik 9"/>
-          <p:cNvPicPr>
-            <a:picLocks noChangeAspect="1"/>
-          </p:cNvPicPr>
-          <p:nvPr/>
-        </p:nvPicPr>
-        <p:blipFill>
-          <a:blip r:embed="rId2"/>
-          <a:stretch>
-            <a:fillRect/>
-          </a:stretch>
-        </p:blipFill>
-        <p:spPr>
-          <a:xfrm>
-            <a:off x="9123595" y="256680"/>
-            <a:ext cx="4127707" cy="1568521"/>
-          </a:xfrm>
-          <a:prstGeom prst="rect">
-            <a:avLst/>
-          </a:prstGeom>
-          <a:ln w="12700">
-            <a:miter lim="400000"/>
-          </a:ln>
-        </p:spPr>
-      </p:pic>
-      <p:sp>
-        <p:nvSpPr>
-          <p:cNvPr id="172" name="Titeltext"/>
-          <p:cNvSpPr txBox="1">
-            <a:spLocks noGrp="1"/>
-          </p:cNvSpPr>
-          <p:nvPr>
-            <p:ph type="title"/>
-          </p:nvPr>
-        </p:nvSpPr>
-        <p:spPr>
-          <a:xfrm>
-            <a:off x="923883" y="402120"/>
-            <a:ext cx="11596089" cy="1460881"/>
-          </a:xfrm>
-          <a:prstGeom prst="rect">
-            <a:avLst/>
-          </a:prstGeom>
-        </p:spPr>
-        <p:txBody>
-          <a:bodyPr lIns="0" tIns="0" rIns="0" bIns="0">
-            <a:normAutofit/>
-          </a:bodyPr>
-          <a:lstStyle>
-            <a:lvl1pPr>
-              <a:lnSpc>
-                <a:spcPct val="100000"/>
-              </a:lnSpc>
-              <a:defRPr sz="1800" spc="0">
-                <a:latin typeface="+mn-lt"/>
-                <a:ea typeface="+mn-ea"/>
-                <a:cs typeface="+mn-cs"/>
-                <a:sym typeface="Helvetica"/>
-              </a:defRPr>
-            </a:lvl1pPr>
-          </a:lstStyle>
-          <a:p>
-            <a:r>
-              <a:t>Titeltext</a:t>
-            </a:r>
-          </a:p>
-        </p:txBody>
-      </p:sp>
-      <p:sp>
-        <p:nvSpPr>
-          <p:cNvPr id="173" name="Textebene 1…"/>
-          <p:cNvSpPr txBox="1">
-            <a:spLocks noGrp="1"/>
-          </p:cNvSpPr>
-          <p:nvPr>
-            <p:ph type="body" sz="half" idx="1"/>
-          </p:nvPr>
-        </p:nvSpPr>
-        <p:spPr>
-          <a:xfrm>
-            <a:off x="923883" y="2012401"/>
-            <a:ext cx="5658550" cy="4796281"/>
-          </a:xfrm>
-          <a:prstGeom prst="rect">
-            <a:avLst/>
-          </a:prstGeom>
-        </p:spPr>
-        <p:txBody>
-          <a:bodyPr lIns="0" tIns="0" rIns="0" bIns="0">
-            <a:normAutofit/>
-          </a:bodyPr>
-          <a:lstStyle>
-            <a:lvl1pPr marL="0" indent="0">
-              <a:lnSpc>
-                <a:spcPct val="100000"/>
-              </a:lnSpc>
-              <a:spcBef>
-                <a:spcPts val="0"/>
-              </a:spcBef>
-              <a:buClrTx/>
-              <a:buSzTx/>
-              <a:buFontTx/>
-              <a:buNone/>
-              <a:defRPr sz="1800" spc="0">
-                <a:latin typeface="+mn-lt"/>
-                <a:ea typeface="+mn-ea"/>
-                <a:cs typeface="+mn-cs"/>
-                <a:sym typeface="Helvetica"/>
-              </a:defRPr>
-            </a:lvl1pPr>
-            <a:lvl2pPr marL="0" indent="0">
-              <a:lnSpc>
-                <a:spcPct val="100000"/>
-              </a:lnSpc>
-              <a:spcBef>
-                <a:spcPts val="0"/>
-              </a:spcBef>
-              <a:buClrTx/>
-              <a:buSzTx/>
-              <a:buFontTx/>
-              <a:buNone/>
-              <a:defRPr sz="1800" spc="0">
-                <a:latin typeface="+mn-lt"/>
-                <a:ea typeface="+mn-ea"/>
-                <a:cs typeface="+mn-cs"/>
-                <a:sym typeface="Helvetica"/>
-              </a:defRPr>
-            </a:lvl2pPr>
-            <a:lvl3pPr marL="0" indent="0">
-              <a:lnSpc>
-                <a:spcPct val="100000"/>
-              </a:lnSpc>
-              <a:spcBef>
-                <a:spcPts val="0"/>
-              </a:spcBef>
-              <a:buClrTx/>
-              <a:buSzTx/>
-              <a:buFontTx/>
-              <a:buNone/>
-              <a:defRPr sz="1800" spc="0">
-                <a:latin typeface="+mn-lt"/>
-                <a:ea typeface="+mn-ea"/>
-                <a:cs typeface="+mn-cs"/>
-                <a:sym typeface="Helvetica"/>
-              </a:defRPr>
-            </a:lvl3pPr>
-            <a:lvl4pPr marL="0" indent="0">
-              <a:lnSpc>
-                <a:spcPct val="100000"/>
-              </a:lnSpc>
-              <a:spcBef>
-                <a:spcPts val="0"/>
-              </a:spcBef>
-              <a:buClrTx/>
-              <a:buSzTx/>
-              <a:buFontTx/>
-              <a:buNone/>
-              <a:defRPr sz="1800" spc="0">
-                <a:latin typeface="+mn-lt"/>
-                <a:ea typeface="+mn-ea"/>
-                <a:cs typeface="+mn-cs"/>
-                <a:sym typeface="Helvetica"/>
-              </a:defRPr>
-            </a:lvl4pPr>
-            <a:lvl5pPr marL="0" indent="0">
-              <a:lnSpc>
-                <a:spcPct val="100000"/>
-              </a:lnSpc>
-              <a:spcBef>
-                <a:spcPts val="0"/>
-              </a:spcBef>
-              <a:buClrTx/>
-              <a:buSzTx/>
-              <a:buFontTx/>
-              <a:buNone/>
-              <a:defRPr sz="1800" spc="0">
-                <a:latin typeface="+mn-lt"/>
-                <a:ea typeface="+mn-ea"/>
-                <a:cs typeface="+mn-cs"/>
-                <a:sym typeface="Helvetica"/>
-              </a:defRPr>
-            </a:lvl5pPr>
-          </a:lstStyle>
-          <a:p>
-            <a:r>
-              <a:t>Textebene 1</a:t>
-            </a:r>
-          </a:p>
-          <a:p>
-            <a:pPr lvl="1"/>
-            <a:r>
-              <a:t>Textebene 2</a:t>
-            </a:r>
-          </a:p>
-          <a:p>
-            <a:pPr lvl="2"/>
-            <a:r>
-              <a:t>Textebene 3</a:t>
-            </a:r>
-          </a:p>
-          <a:p>
-            <a:pPr lvl="3"/>
-            <a:r>
-              <a:t>Textebene 4</a:t>
-            </a:r>
-          </a:p>
-          <a:p>
-            <a:pPr lvl="4"/>
-            <a:r>
-              <a:t>Textebene 5</a:t>
-            </a:r>
-          </a:p>
-        </p:txBody>
-      </p:sp>
-      <p:sp>
-        <p:nvSpPr>
-          <p:cNvPr id="174" name="Foliennummer"/>
-          <p:cNvSpPr txBox="1">
-            <a:spLocks noGrp="1"/>
-          </p:cNvSpPr>
-          <p:nvPr>
-            <p:ph type="sldNum" sz="quarter" idx="2"/>
-          </p:nvPr>
-        </p:nvSpPr>
-        <p:spPr>
-          <a:prstGeom prst="rect">
-            <a:avLst/>
-          </a:prstGeom>
-        </p:spPr>
-        <p:txBody>
-          <a:bodyPr/>
-          <a:lstStyle/>
-          <a:p>
-            <a:fld id="{86CB4B4D-7CA3-9044-876B-883B54F8677D}" type="slidenum">
-              <a:t>‹Nr.›</a:t>
-            </a:fld>
-            <a:endParaRPr/>
-          </a:p>
-        </p:txBody>
-      </p:sp>
-    </p:spTree>
-  </p:cSld>
-  <p:clrMapOvr>
-    <a:masterClrMapping/>
-  </p:clrMapOvr>
-  <p:transition spd="med"/>
-</p:sldLayout>
-</file>
-
-<file path=ppt/slideLayouts/slideLayout14.xml><?xml version="1.0" encoding="utf-8"?>
-<p:sldLayout xmlns:a="http://schemas.openxmlformats.org/drawingml/2006/main" xmlns:r="http://schemas.openxmlformats.org/officeDocument/2006/relationships" xmlns:p="http://schemas.openxmlformats.org/presentationml/2006/main" showMasterSp="0" type="tx">
-  <p:cSld name="Title Only">
-    <p:spTree>
-      <p:nvGrpSpPr>
-        <p:cNvPr id="1" name=""/>
-        <p:cNvGrpSpPr/>
-        <p:nvPr/>
-      </p:nvGrpSpPr>
-      <p:grpSpPr>
-        <a:xfrm>
-          <a:off x="0" y="0"/>
-          <a:ext cx="0" cy="0"/>
-          <a:chOff x="0" y="0"/>
-          <a:chExt cx="0" cy="0"/>
-        </a:xfrm>
-      </p:grpSpPr>
-      <p:sp>
-        <p:nvSpPr>
-          <p:cNvPr id="181" name="Rechteck 7"/>
-          <p:cNvSpPr/>
-          <p:nvPr/>
-        </p:nvSpPr>
-        <p:spPr>
-          <a:xfrm>
-            <a:off x="0" y="5259600"/>
-            <a:ext cx="13444816" cy="2299681"/>
-          </a:xfrm>
-          <a:prstGeom prst="rect">
-            <a:avLst/>
-          </a:prstGeom>
-          <a:gradFill>
-            <a:gsLst>
-              <a:gs pos="0">
-                <a:srgbClr val="FFDB89"/>
-              </a:gs>
-              <a:gs pos="100000">
-                <a:srgbClr val="FFFFFF"/>
-              </a:gs>
-            </a:gsLst>
-            <a:lin ang="16200000"/>
-          </a:gradFill>
-          <a:ln w="12700">
-            <a:miter lim="400000"/>
-          </a:ln>
-        </p:spPr>
-        <p:txBody>
-          <a:bodyPr lIns="0" tIns="0" rIns="0" bIns="0"/>
-          <a:lstStyle/>
-          <a:p>
-            <a:endParaRPr sz="1800"/>
-          </a:p>
-        </p:txBody>
-      </p:sp>
-      <p:pic>
-        <p:nvPicPr>
-          <p:cNvPr id="182" name="Grafik 9" descr="Grafik 9"/>
-          <p:cNvPicPr>
-            <a:picLocks noChangeAspect="1"/>
-          </p:cNvPicPr>
-          <p:nvPr/>
-        </p:nvPicPr>
-        <p:blipFill>
-          <a:blip r:embed="rId2"/>
-          <a:stretch>
-            <a:fillRect/>
-          </a:stretch>
-        </p:blipFill>
-        <p:spPr>
-          <a:xfrm>
-            <a:off x="9123595" y="256680"/>
-            <a:ext cx="4127707" cy="1568521"/>
-          </a:xfrm>
-          <a:prstGeom prst="rect">
-            <a:avLst/>
-          </a:prstGeom>
-          <a:ln w="12700">
-            <a:miter lim="400000"/>
-          </a:ln>
-        </p:spPr>
-      </p:pic>
-      <p:sp>
-        <p:nvSpPr>
-          <p:cNvPr id="183" name="Titeltext"/>
-          <p:cNvSpPr txBox="1">
-            <a:spLocks noGrp="1"/>
-          </p:cNvSpPr>
-          <p:nvPr>
-            <p:ph type="title"/>
-          </p:nvPr>
-        </p:nvSpPr>
-        <p:spPr>
-          <a:xfrm>
-            <a:off x="923883" y="402120"/>
-            <a:ext cx="11596089" cy="1460881"/>
-          </a:xfrm>
-          <a:prstGeom prst="rect">
-            <a:avLst/>
-          </a:prstGeom>
-        </p:spPr>
-        <p:txBody>
-          <a:bodyPr lIns="0" tIns="0" rIns="0" bIns="0">
-            <a:normAutofit/>
-          </a:bodyPr>
-          <a:lstStyle>
-            <a:lvl1pPr>
-              <a:lnSpc>
-                <a:spcPct val="100000"/>
-              </a:lnSpc>
-              <a:defRPr sz="1800" spc="0">
-                <a:latin typeface="+mn-lt"/>
-                <a:ea typeface="+mn-ea"/>
-                <a:cs typeface="+mn-cs"/>
-                <a:sym typeface="Helvetica"/>
-              </a:defRPr>
-            </a:lvl1pPr>
-          </a:lstStyle>
-          <a:p>
-            <a:r>
-              <a:t>Titeltext</a:t>
-            </a:r>
-          </a:p>
-        </p:txBody>
-      </p:sp>
-      <p:sp>
-        <p:nvSpPr>
-          <p:cNvPr id="184" name="Foliennummer"/>
-          <p:cNvSpPr txBox="1">
-            <a:spLocks noGrp="1"/>
-          </p:cNvSpPr>
-          <p:nvPr>
-            <p:ph type="sldNum" sz="quarter" idx="2"/>
-          </p:nvPr>
-        </p:nvSpPr>
-        <p:spPr>
-          <a:prstGeom prst="rect">
-            <a:avLst/>
-          </a:prstGeom>
-        </p:spPr>
-        <p:txBody>
-          <a:bodyPr/>
-          <a:lstStyle/>
-          <a:p>
-            <a:fld id="{86CB4B4D-7CA3-9044-876B-883B54F8677D}" type="slidenum">
-              <a:t>‹Nr.›</a:t>
-            </a:fld>
-            <a:endParaRPr/>
-          </a:p>
-        </p:txBody>
-      </p:sp>
-    </p:spTree>
-  </p:cSld>
-  <p:clrMapOvr>
-    <a:masterClrMapping/>
-  </p:clrMapOvr>
-  <p:transition spd="med"/>
-</p:sldLayout>
-</file>
-
-<file path=ppt/slideLayouts/slideLayout15.xml><?xml version="1.0" encoding="utf-8"?>
-<p:sldLayout xmlns:a="http://schemas.openxmlformats.org/drawingml/2006/main" xmlns:r="http://schemas.openxmlformats.org/officeDocument/2006/relationships" xmlns:p="http://schemas.openxmlformats.org/presentationml/2006/main" showMasterSp="0" type="tx">
-  <p:cSld name="Centered Text">
-    <p:spTree>
-      <p:nvGrpSpPr>
-        <p:cNvPr id="1" name=""/>
-        <p:cNvGrpSpPr/>
-        <p:nvPr/>
-      </p:nvGrpSpPr>
-      <p:grpSpPr>
-        <a:xfrm>
-          <a:off x="0" y="0"/>
-          <a:ext cx="0" cy="0"/>
-          <a:chOff x="0" y="0"/>
-          <a:chExt cx="0" cy="0"/>
-        </a:xfrm>
-      </p:grpSpPr>
-      <p:sp>
-        <p:nvSpPr>
-          <p:cNvPr id="191" name="Rechteck 7"/>
-          <p:cNvSpPr/>
-          <p:nvPr/>
-        </p:nvSpPr>
-        <p:spPr>
-          <a:xfrm>
-            <a:off x="0" y="5259600"/>
-            <a:ext cx="13444816" cy="2299681"/>
-          </a:xfrm>
-          <a:prstGeom prst="rect">
-            <a:avLst/>
-          </a:prstGeom>
-          <a:gradFill>
-            <a:gsLst>
-              <a:gs pos="0">
-                <a:srgbClr val="FFDB89"/>
-              </a:gs>
-              <a:gs pos="100000">
-                <a:srgbClr val="FFFFFF"/>
-              </a:gs>
-            </a:gsLst>
-            <a:lin ang="16200000"/>
-          </a:gradFill>
-          <a:ln w="12700">
-            <a:miter lim="400000"/>
-          </a:ln>
-        </p:spPr>
-        <p:txBody>
-          <a:bodyPr lIns="0" tIns="0" rIns="0" bIns="0"/>
-          <a:lstStyle/>
-          <a:p>
-            <a:endParaRPr sz="1800"/>
-          </a:p>
-        </p:txBody>
-      </p:sp>
-      <p:pic>
-        <p:nvPicPr>
-          <p:cNvPr id="192" name="Grafik 9" descr="Grafik 9"/>
-          <p:cNvPicPr>
-            <a:picLocks noChangeAspect="1"/>
-          </p:cNvPicPr>
-          <p:nvPr/>
-        </p:nvPicPr>
-        <p:blipFill>
-          <a:blip r:embed="rId2"/>
-          <a:stretch>
-            <a:fillRect/>
-          </a:stretch>
-        </p:blipFill>
-        <p:spPr>
-          <a:xfrm>
-            <a:off x="9123595" y="256680"/>
-            <a:ext cx="4127707" cy="1568521"/>
-          </a:xfrm>
-          <a:prstGeom prst="rect">
-            <a:avLst/>
-          </a:prstGeom>
-          <a:ln w="12700">
-            <a:miter lim="400000"/>
-          </a:ln>
-        </p:spPr>
-      </p:pic>
-      <p:sp>
-        <p:nvSpPr>
-          <p:cNvPr id="193" name="Textebene 1…"/>
-          <p:cNvSpPr txBox="1">
-            <a:spLocks noGrp="1"/>
-          </p:cNvSpPr>
-          <p:nvPr>
-            <p:ph type="body" idx="1"/>
-          </p:nvPr>
-        </p:nvSpPr>
-        <p:spPr>
-          <a:xfrm>
-            <a:off x="923883" y="402120"/>
-            <a:ext cx="11596089" cy="6773041"/>
-          </a:xfrm>
-          <a:prstGeom prst="rect">
-            <a:avLst/>
-          </a:prstGeom>
-        </p:spPr>
-        <p:txBody>
-          <a:bodyPr lIns="0" tIns="0" rIns="0" bIns="0" anchor="ctr">
-            <a:normAutofit/>
-          </a:bodyPr>
-          <a:lstStyle>
-            <a:lvl1pPr marL="0" indent="0">
-              <a:lnSpc>
-                <a:spcPct val="100000"/>
-              </a:lnSpc>
-              <a:spcBef>
-                <a:spcPts val="0"/>
-              </a:spcBef>
-              <a:buClrTx/>
-              <a:buSzTx/>
-              <a:buFontTx/>
-              <a:buNone/>
-              <a:defRPr sz="1800" spc="0">
-                <a:latin typeface="+mn-lt"/>
-                <a:ea typeface="+mn-ea"/>
-                <a:cs typeface="+mn-cs"/>
-                <a:sym typeface="Helvetica"/>
-              </a:defRPr>
-            </a:lvl1pPr>
-            <a:lvl2pPr marL="0" indent="0">
-              <a:lnSpc>
-                <a:spcPct val="100000"/>
-              </a:lnSpc>
-              <a:spcBef>
-                <a:spcPts val="0"/>
-              </a:spcBef>
-              <a:buClrTx/>
-              <a:buSzTx/>
-              <a:buFontTx/>
-              <a:buNone/>
-              <a:defRPr sz="1800" spc="0">
-                <a:latin typeface="+mn-lt"/>
-                <a:ea typeface="+mn-ea"/>
-                <a:cs typeface="+mn-cs"/>
-                <a:sym typeface="Helvetica"/>
-              </a:defRPr>
-            </a:lvl2pPr>
-            <a:lvl3pPr marL="0" indent="0">
-              <a:lnSpc>
-                <a:spcPct val="100000"/>
-              </a:lnSpc>
-              <a:spcBef>
-                <a:spcPts val="0"/>
-              </a:spcBef>
-              <a:buClrTx/>
-              <a:buSzTx/>
-              <a:buFontTx/>
-              <a:buNone/>
-              <a:defRPr sz="1800" spc="0">
-                <a:latin typeface="+mn-lt"/>
-                <a:ea typeface="+mn-ea"/>
-                <a:cs typeface="+mn-cs"/>
-                <a:sym typeface="Helvetica"/>
-              </a:defRPr>
-            </a:lvl3pPr>
-            <a:lvl4pPr marL="0" indent="0">
-              <a:lnSpc>
-                <a:spcPct val="100000"/>
-              </a:lnSpc>
-              <a:spcBef>
-                <a:spcPts val="0"/>
-              </a:spcBef>
-              <a:buClrTx/>
-              <a:buSzTx/>
-              <a:buFontTx/>
-              <a:buNone/>
-              <a:defRPr sz="1800" spc="0">
-                <a:latin typeface="+mn-lt"/>
-                <a:ea typeface="+mn-ea"/>
-                <a:cs typeface="+mn-cs"/>
-                <a:sym typeface="Helvetica"/>
-              </a:defRPr>
-            </a:lvl4pPr>
-            <a:lvl5pPr marL="0" indent="0">
-              <a:lnSpc>
-                <a:spcPct val="100000"/>
-              </a:lnSpc>
-              <a:spcBef>
-                <a:spcPts val="0"/>
-              </a:spcBef>
-              <a:buClrTx/>
-              <a:buSzTx/>
-              <a:buFontTx/>
-              <a:buNone/>
-              <a:defRPr sz="1800" spc="0">
-                <a:latin typeface="+mn-lt"/>
-                <a:ea typeface="+mn-ea"/>
-                <a:cs typeface="+mn-cs"/>
-                <a:sym typeface="Helvetica"/>
-              </a:defRPr>
-            </a:lvl5pPr>
-          </a:lstStyle>
-          <a:p>
-            <a:r>
-              <a:t>Textebene 1</a:t>
-            </a:r>
-          </a:p>
-          <a:p>
-            <a:pPr lvl="1"/>
-            <a:r>
-              <a:t>Textebene 2</a:t>
-            </a:r>
-          </a:p>
-          <a:p>
-            <a:pPr lvl="2"/>
-            <a:r>
-              <a:t>Textebene 3</a:t>
-            </a:r>
-          </a:p>
-          <a:p>
-            <a:pPr lvl="3"/>
-            <a:r>
-              <a:t>Textebene 4</a:t>
-            </a:r>
-          </a:p>
-          <a:p>
-            <a:pPr lvl="4"/>
-            <a:r>
-              <a:t>Textebene 5</a:t>
-            </a:r>
-          </a:p>
-        </p:txBody>
-      </p:sp>
-      <p:sp>
-        <p:nvSpPr>
-          <p:cNvPr id="194" name="Foliennummer"/>
-          <p:cNvSpPr txBox="1">
-            <a:spLocks noGrp="1"/>
-          </p:cNvSpPr>
-          <p:nvPr>
-            <p:ph type="sldNum" sz="quarter" idx="2"/>
-          </p:nvPr>
-        </p:nvSpPr>
-        <p:spPr>
-          <a:prstGeom prst="rect">
-            <a:avLst/>
-          </a:prstGeom>
-        </p:spPr>
-        <p:txBody>
-          <a:bodyPr/>
-          <a:lstStyle/>
-          <a:p>
-            <a:fld id="{86CB4B4D-7CA3-9044-876B-883B54F8677D}" type="slidenum">
-              <a:t>‹Nr.›</a:t>
-            </a:fld>
-            <a:endParaRPr/>
-          </a:p>
-        </p:txBody>
-      </p:sp>
-    </p:spTree>
-  </p:cSld>
-  <p:clrMapOvr>
-    <a:masterClrMapping/>
-  </p:clrMapOvr>
-  <p:transition spd="med"/>
-</p:sldLayout>
-</file>
-
-<file path=ppt/slideLayouts/slideLayout16.xml><?xml version="1.0" encoding="utf-8"?>
-<p:sldLayout xmlns:a="http://schemas.openxmlformats.org/drawingml/2006/main" xmlns:r="http://schemas.openxmlformats.org/officeDocument/2006/relationships" xmlns:p="http://schemas.openxmlformats.org/presentationml/2006/main" showMasterSp="0" type="tx">
-  <p:cSld name="Title, 2 Content and Content">
-    <p:spTree>
-      <p:nvGrpSpPr>
-        <p:cNvPr id="1" name=""/>
-        <p:cNvGrpSpPr/>
-        <p:nvPr/>
-      </p:nvGrpSpPr>
-      <p:grpSpPr>
-        <a:xfrm>
-          <a:off x="0" y="0"/>
-          <a:ext cx="0" cy="0"/>
-          <a:chOff x="0" y="0"/>
-          <a:chExt cx="0" cy="0"/>
-        </a:xfrm>
-      </p:grpSpPr>
-      <p:sp>
-        <p:nvSpPr>
-          <p:cNvPr id="201" name="Rechteck 7"/>
-          <p:cNvSpPr/>
-          <p:nvPr/>
-        </p:nvSpPr>
-        <p:spPr>
-          <a:xfrm>
-            <a:off x="0" y="5259600"/>
-            <a:ext cx="13444816" cy="2299681"/>
-          </a:xfrm>
-          <a:prstGeom prst="rect">
-            <a:avLst/>
-          </a:prstGeom>
-          <a:gradFill>
-            <a:gsLst>
-              <a:gs pos="0">
-                <a:srgbClr val="FFDB89"/>
-              </a:gs>
-              <a:gs pos="100000">
-                <a:srgbClr val="FFFFFF"/>
-              </a:gs>
-            </a:gsLst>
-            <a:lin ang="16200000"/>
-          </a:gradFill>
-          <a:ln w="12700">
-            <a:miter lim="400000"/>
-          </a:ln>
-        </p:spPr>
-        <p:txBody>
-          <a:bodyPr lIns="0" tIns="0" rIns="0" bIns="0"/>
-          <a:lstStyle/>
-          <a:p>
-            <a:endParaRPr sz="1800"/>
-          </a:p>
-        </p:txBody>
-      </p:sp>
-      <p:pic>
-        <p:nvPicPr>
-          <p:cNvPr id="202" name="Grafik 9" descr="Grafik 9"/>
-          <p:cNvPicPr>
-            <a:picLocks noChangeAspect="1"/>
-          </p:cNvPicPr>
-          <p:nvPr/>
-        </p:nvPicPr>
-        <p:blipFill>
-          <a:blip r:embed="rId2"/>
-          <a:stretch>
-            <a:fillRect/>
-          </a:stretch>
-        </p:blipFill>
-        <p:spPr>
-          <a:xfrm>
-            <a:off x="9123595" y="256680"/>
-            <a:ext cx="4127707" cy="1568521"/>
-          </a:xfrm>
-          <a:prstGeom prst="rect">
-            <a:avLst/>
-          </a:prstGeom>
-          <a:ln w="12700">
-            <a:miter lim="400000"/>
-          </a:ln>
-        </p:spPr>
-      </p:pic>
-      <p:sp>
-        <p:nvSpPr>
-          <p:cNvPr id="203" name="Titeltext"/>
-          <p:cNvSpPr txBox="1">
-            <a:spLocks noGrp="1"/>
-          </p:cNvSpPr>
-          <p:nvPr>
-            <p:ph type="title"/>
-          </p:nvPr>
-        </p:nvSpPr>
-        <p:spPr>
-          <a:xfrm>
-            <a:off x="923883" y="402120"/>
-            <a:ext cx="11596089" cy="1460881"/>
-          </a:xfrm>
-          <a:prstGeom prst="rect">
-            <a:avLst/>
-          </a:prstGeom>
-        </p:spPr>
-        <p:txBody>
-          <a:bodyPr lIns="0" tIns="0" rIns="0" bIns="0">
-            <a:normAutofit/>
-          </a:bodyPr>
-          <a:lstStyle>
-            <a:lvl1pPr>
-              <a:lnSpc>
-                <a:spcPct val="100000"/>
-              </a:lnSpc>
-              <a:defRPr sz="1800" spc="0">
-                <a:latin typeface="+mn-lt"/>
-                <a:ea typeface="+mn-ea"/>
-                <a:cs typeface="+mn-cs"/>
-                <a:sym typeface="Helvetica"/>
-              </a:defRPr>
-            </a:lvl1pPr>
-          </a:lstStyle>
-          <a:p>
-            <a:r>
-              <a:t>Titeltext</a:t>
-            </a:r>
-          </a:p>
-        </p:txBody>
-      </p:sp>
-      <p:sp>
-        <p:nvSpPr>
-          <p:cNvPr id="204" name="Textebene 1…"/>
-          <p:cNvSpPr txBox="1">
-            <a:spLocks noGrp="1"/>
-          </p:cNvSpPr>
-          <p:nvPr>
-            <p:ph type="body" sz="quarter" idx="1"/>
-          </p:nvPr>
-        </p:nvSpPr>
-        <p:spPr>
-          <a:xfrm>
-            <a:off x="923883" y="2012401"/>
-            <a:ext cx="5658550" cy="2287801"/>
-          </a:xfrm>
-          <a:prstGeom prst="rect">
-            <a:avLst/>
-          </a:prstGeom>
-        </p:spPr>
-        <p:txBody>
-          <a:bodyPr lIns="0" tIns="0" rIns="0" bIns="0">
-            <a:normAutofit/>
-          </a:bodyPr>
-          <a:lstStyle>
-            <a:lvl1pPr marL="0" indent="0">
-              <a:lnSpc>
-                <a:spcPct val="100000"/>
-              </a:lnSpc>
-              <a:spcBef>
-                <a:spcPts val="0"/>
-              </a:spcBef>
-              <a:buClrTx/>
-              <a:buSzTx/>
-              <a:buFontTx/>
-              <a:buNone/>
-              <a:defRPr sz="1800" spc="0">
-                <a:latin typeface="+mn-lt"/>
-                <a:ea typeface="+mn-ea"/>
-                <a:cs typeface="+mn-cs"/>
-                <a:sym typeface="Helvetica"/>
-              </a:defRPr>
-            </a:lvl1pPr>
-            <a:lvl2pPr marL="0" indent="0">
-              <a:lnSpc>
-                <a:spcPct val="100000"/>
-              </a:lnSpc>
-              <a:spcBef>
-                <a:spcPts val="0"/>
-              </a:spcBef>
-              <a:buClrTx/>
-              <a:buSzTx/>
-              <a:buFontTx/>
-              <a:buNone/>
-              <a:defRPr sz="1800" spc="0">
-                <a:latin typeface="+mn-lt"/>
-                <a:ea typeface="+mn-ea"/>
-                <a:cs typeface="+mn-cs"/>
-                <a:sym typeface="Helvetica"/>
-              </a:defRPr>
-            </a:lvl2pPr>
-            <a:lvl3pPr marL="0" indent="0">
-              <a:lnSpc>
-                <a:spcPct val="100000"/>
-              </a:lnSpc>
-              <a:spcBef>
-                <a:spcPts val="0"/>
-              </a:spcBef>
-              <a:buClrTx/>
-              <a:buSzTx/>
-              <a:buFontTx/>
-              <a:buNone/>
-              <a:defRPr sz="1800" spc="0">
-                <a:latin typeface="+mn-lt"/>
-                <a:ea typeface="+mn-ea"/>
-                <a:cs typeface="+mn-cs"/>
-                <a:sym typeface="Helvetica"/>
-              </a:defRPr>
-            </a:lvl3pPr>
-            <a:lvl4pPr marL="0" indent="0">
-              <a:lnSpc>
-                <a:spcPct val="100000"/>
-              </a:lnSpc>
-              <a:spcBef>
-                <a:spcPts val="0"/>
-              </a:spcBef>
-              <a:buClrTx/>
-              <a:buSzTx/>
-              <a:buFontTx/>
-              <a:buNone/>
-              <a:defRPr sz="1800" spc="0">
-                <a:latin typeface="+mn-lt"/>
-                <a:ea typeface="+mn-ea"/>
-                <a:cs typeface="+mn-cs"/>
-                <a:sym typeface="Helvetica"/>
-              </a:defRPr>
-            </a:lvl4pPr>
-            <a:lvl5pPr marL="0" indent="0">
-              <a:lnSpc>
-                <a:spcPct val="100000"/>
-              </a:lnSpc>
-              <a:spcBef>
-                <a:spcPts val="0"/>
-              </a:spcBef>
-              <a:buClrTx/>
-              <a:buSzTx/>
-              <a:buFontTx/>
-              <a:buNone/>
-              <a:defRPr sz="1800" spc="0">
-                <a:latin typeface="+mn-lt"/>
-                <a:ea typeface="+mn-ea"/>
-                <a:cs typeface="+mn-cs"/>
-                <a:sym typeface="Helvetica"/>
-              </a:defRPr>
-            </a:lvl5pPr>
-          </a:lstStyle>
-          <a:p>
-            <a:r>
-              <a:t>Textebene 1</a:t>
-            </a:r>
-          </a:p>
-          <a:p>
-            <a:pPr lvl="1"/>
-            <a:r>
-              <a:t>Textebene 2</a:t>
-            </a:r>
-          </a:p>
-          <a:p>
-            <a:pPr lvl="2"/>
-            <a:r>
-              <a:t>Textebene 3</a:t>
-            </a:r>
-          </a:p>
-          <a:p>
-            <a:pPr lvl="3"/>
-            <a:r>
-              <a:t>Textebene 4</a:t>
-            </a:r>
-          </a:p>
-          <a:p>
-            <a:pPr lvl="4"/>
-            <a:r>
-              <a:t>Textebene 5</a:t>
-            </a:r>
-          </a:p>
-        </p:txBody>
-      </p:sp>
-      <p:sp>
-        <p:nvSpPr>
-          <p:cNvPr id="205" name="Foliennummer"/>
-          <p:cNvSpPr txBox="1">
-            <a:spLocks noGrp="1"/>
-          </p:cNvSpPr>
-          <p:nvPr>
-            <p:ph type="sldNum" sz="quarter" idx="2"/>
-          </p:nvPr>
-        </p:nvSpPr>
-        <p:spPr>
-          <a:prstGeom prst="rect">
-            <a:avLst/>
-          </a:prstGeom>
-        </p:spPr>
-        <p:txBody>
-          <a:bodyPr/>
-          <a:lstStyle/>
-          <a:p>
-            <a:fld id="{86CB4B4D-7CA3-9044-876B-883B54F8677D}" type="slidenum">
-              <a:t>‹Nr.›</a:t>
-            </a:fld>
-            <a:endParaRPr/>
-          </a:p>
-        </p:txBody>
-      </p:sp>
-    </p:spTree>
-  </p:cSld>
-  <p:clrMapOvr>
-    <a:masterClrMapping/>
-  </p:clrMapOvr>
-  <p:transition spd="med"/>
-</p:sldLayout>
-</file>
-
-<file path=ppt/slideLayouts/slideLayout17.xml><?xml version="1.0" encoding="utf-8"?>
-<p:sldLayout xmlns:a="http://schemas.openxmlformats.org/drawingml/2006/main" xmlns:r="http://schemas.openxmlformats.org/officeDocument/2006/relationships" xmlns:p="http://schemas.openxmlformats.org/presentationml/2006/main" showMasterSp="0" type="tx">
-  <p:cSld name="Title Content and 2 Content">
-    <p:spTree>
-      <p:nvGrpSpPr>
-        <p:cNvPr id="1" name=""/>
-        <p:cNvGrpSpPr/>
-        <p:nvPr/>
-      </p:nvGrpSpPr>
-      <p:grpSpPr>
-        <a:xfrm>
-          <a:off x="0" y="0"/>
-          <a:ext cx="0" cy="0"/>
-          <a:chOff x="0" y="0"/>
-          <a:chExt cx="0" cy="0"/>
-        </a:xfrm>
-      </p:grpSpPr>
-      <p:sp>
-        <p:nvSpPr>
-          <p:cNvPr id="212" name="Rechteck 7"/>
-          <p:cNvSpPr/>
-          <p:nvPr/>
-        </p:nvSpPr>
-        <p:spPr>
-          <a:xfrm>
-            <a:off x="0" y="5259600"/>
-            <a:ext cx="13444816" cy="2299681"/>
-          </a:xfrm>
-          <a:prstGeom prst="rect">
-            <a:avLst/>
-          </a:prstGeom>
-          <a:gradFill>
-            <a:gsLst>
-              <a:gs pos="0">
-                <a:srgbClr val="FFDB89"/>
-              </a:gs>
-              <a:gs pos="100000">
-                <a:srgbClr val="FFFFFF"/>
-              </a:gs>
-            </a:gsLst>
-            <a:lin ang="16200000"/>
-          </a:gradFill>
-          <a:ln w="12700">
-            <a:miter lim="400000"/>
-          </a:ln>
-        </p:spPr>
-        <p:txBody>
-          <a:bodyPr lIns="0" tIns="0" rIns="0" bIns="0"/>
-          <a:lstStyle/>
-          <a:p>
-            <a:endParaRPr sz="1800"/>
-          </a:p>
-        </p:txBody>
-      </p:sp>
-      <p:pic>
-        <p:nvPicPr>
-          <p:cNvPr id="213" name="Grafik 9" descr="Grafik 9"/>
-          <p:cNvPicPr>
-            <a:picLocks noChangeAspect="1"/>
-          </p:cNvPicPr>
-          <p:nvPr/>
-        </p:nvPicPr>
-        <p:blipFill>
-          <a:blip r:embed="rId2"/>
-          <a:stretch>
-            <a:fillRect/>
-          </a:stretch>
-        </p:blipFill>
-        <p:spPr>
-          <a:xfrm>
-            <a:off x="9123595" y="256680"/>
-            <a:ext cx="4127707" cy="1568521"/>
-          </a:xfrm>
-          <a:prstGeom prst="rect">
-            <a:avLst/>
-          </a:prstGeom>
-          <a:ln w="12700">
-            <a:miter lim="400000"/>
-          </a:ln>
-        </p:spPr>
-      </p:pic>
-      <p:sp>
-        <p:nvSpPr>
-          <p:cNvPr id="214" name="Titeltext"/>
-          <p:cNvSpPr txBox="1">
-            <a:spLocks noGrp="1"/>
-          </p:cNvSpPr>
-          <p:nvPr>
-            <p:ph type="title"/>
-          </p:nvPr>
-        </p:nvSpPr>
-        <p:spPr>
-          <a:xfrm>
-            <a:off x="923883" y="402120"/>
-            <a:ext cx="11596089" cy="1460881"/>
-          </a:xfrm>
-          <a:prstGeom prst="rect">
-            <a:avLst/>
-          </a:prstGeom>
-        </p:spPr>
-        <p:txBody>
-          <a:bodyPr lIns="0" tIns="0" rIns="0" bIns="0">
-            <a:normAutofit/>
-          </a:bodyPr>
-          <a:lstStyle>
-            <a:lvl1pPr>
-              <a:lnSpc>
-                <a:spcPct val="100000"/>
-              </a:lnSpc>
-              <a:defRPr sz="1800" spc="0">
-                <a:latin typeface="+mn-lt"/>
-                <a:ea typeface="+mn-ea"/>
-                <a:cs typeface="+mn-cs"/>
-                <a:sym typeface="Helvetica"/>
-              </a:defRPr>
-            </a:lvl1pPr>
-          </a:lstStyle>
-          <a:p>
-            <a:r>
-              <a:t>Titeltext</a:t>
-            </a:r>
-          </a:p>
-        </p:txBody>
-      </p:sp>
-      <p:sp>
-        <p:nvSpPr>
-          <p:cNvPr id="215" name="Textebene 1…"/>
-          <p:cNvSpPr txBox="1">
-            <a:spLocks noGrp="1"/>
-          </p:cNvSpPr>
-          <p:nvPr>
-            <p:ph type="body" sz="half" idx="1"/>
-          </p:nvPr>
-        </p:nvSpPr>
-        <p:spPr>
-          <a:xfrm>
-            <a:off x="923883" y="2012401"/>
-            <a:ext cx="5658550" cy="4796281"/>
-          </a:xfrm>
-          <a:prstGeom prst="rect">
-            <a:avLst/>
-          </a:prstGeom>
-        </p:spPr>
-        <p:txBody>
-          <a:bodyPr lIns="0" tIns="0" rIns="0" bIns="0">
-            <a:normAutofit/>
-          </a:bodyPr>
-          <a:lstStyle>
-            <a:lvl1pPr marL="0" indent="0">
-              <a:lnSpc>
-                <a:spcPct val="100000"/>
-              </a:lnSpc>
-              <a:spcBef>
-                <a:spcPts val="0"/>
-              </a:spcBef>
-              <a:buClrTx/>
-              <a:buSzTx/>
-              <a:buFontTx/>
-              <a:buNone/>
-              <a:defRPr sz="1800" spc="0">
-                <a:latin typeface="+mn-lt"/>
-                <a:ea typeface="+mn-ea"/>
-                <a:cs typeface="+mn-cs"/>
-                <a:sym typeface="Helvetica"/>
-              </a:defRPr>
-            </a:lvl1pPr>
-            <a:lvl2pPr marL="0" indent="0">
-              <a:lnSpc>
-                <a:spcPct val="100000"/>
-              </a:lnSpc>
-              <a:spcBef>
-                <a:spcPts val="0"/>
-              </a:spcBef>
-              <a:buClrTx/>
-              <a:buSzTx/>
-              <a:buFontTx/>
-              <a:buNone/>
-              <a:defRPr sz="1800" spc="0">
-                <a:latin typeface="+mn-lt"/>
-                <a:ea typeface="+mn-ea"/>
-                <a:cs typeface="+mn-cs"/>
-                <a:sym typeface="Helvetica"/>
-              </a:defRPr>
-            </a:lvl2pPr>
-            <a:lvl3pPr marL="0" indent="0">
-              <a:lnSpc>
-                <a:spcPct val="100000"/>
-              </a:lnSpc>
-              <a:spcBef>
-                <a:spcPts val="0"/>
-              </a:spcBef>
-              <a:buClrTx/>
-              <a:buSzTx/>
-              <a:buFontTx/>
-              <a:buNone/>
-              <a:defRPr sz="1800" spc="0">
-                <a:latin typeface="+mn-lt"/>
-                <a:ea typeface="+mn-ea"/>
-                <a:cs typeface="+mn-cs"/>
-                <a:sym typeface="Helvetica"/>
-              </a:defRPr>
-            </a:lvl3pPr>
-            <a:lvl4pPr marL="0" indent="0">
-              <a:lnSpc>
-                <a:spcPct val="100000"/>
-              </a:lnSpc>
-              <a:spcBef>
-                <a:spcPts val="0"/>
-              </a:spcBef>
-              <a:buClrTx/>
-              <a:buSzTx/>
-              <a:buFontTx/>
-              <a:buNone/>
-              <a:defRPr sz="1800" spc="0">
-                <a:latin typeface="+mn-lt"/>
-                <a:ea typeface="+mn-ea"/>
-                <a:cs typeface="+mn-cs"/>
-                <a:sym typeface="Helvetica"/>
-              </a:defRPr>
-            </a:lvl4pPr>
-            <a:lvl5pPr marL="0" indent="0">
-              <a:lnSpc>
-                <a:spcPct val="100000"/>
-              </a:lnSpc>
-              <a:spcBef>
-                <a:spcPts val="0"/>
-              </a:spcBef>
-              <a:buClrTx/>
-              <a:buSzTx/>
-              <a:buFontTx/>
-              <a:buNone/>
-              <a:defRPr sz="1800" spc="0">
-                <a:latin typeface="+mn-lt"/>
-                <a:ea typeface="+mn-ea"/>
-                <a:cs typeface="+mn-cs"/>
-                <a:sym typeface="Helvetica"/>
-              </a:defRPr>
-            </a:lvl5pPr>
-          </a:lstStyle>
-          <a:p>
-            <a:r>
-              <a:t>Textebene 1</a:t>
-            </a:r>
-          </a:p>
-          <a:p>
-            <a:pPr lvl="1"/>
-            <a:r>
-              <a:t>Textebene 2</a:t>
-            </a:r>
-          </a:p>
-          <a:p>
-            <a:pPr lvl="2"/>
-            <a:r>
-              <a:t>Textebene 3</a:t>
-            </a:r>
-          </a:p>
-          <a:p>
-            <a:pPr lvl="3"/>
-            <a:r>
-              <a:t>Textebene 4</a:t>
-            </a:r>
-          </a:p>
-          <a:p>
-            <a:pPr lvl="4"/>
-            <a:r>
-              <a:t>Textebene 5</a:t>
-            </a:r>
-          </a:p>
-        </p:txBody>
-      </p:sp>
-      <p:sp>
-        <p:nvSpPr>
-          <p:cNvPr id="216" name="Foliennummer"/>
-          <p:cNvSpPr txBox="1">
-            <a:spLocks noGrp="1"/>
-          </p:cNvSpPr>
-          <p:nvPr>
-            <p:ph type="sldNum" sz="quarter" idx="2"/>
-          </p:nvPr>
-        </p:nvSpPr>
-        <p:spPr>
-          <a:prstGeom prst="rect">
-            <a:avLst/>
-          </a:prstGeom>
-        </p:spPr>
-        <p:txBody>
-          <a:bodyPr/>
-          <a:lstStyle/>
-          <a:p>
-            <a:fld id="{86CB4B4D-7CA3-9044-876B-883B54F8677D}" type="slidenum">
-              <a:t>‹Nr.›</a:t>
-            </a:fld>
-            <a:endParaRPr/>
-          </a:p>
-        </p:txBody>
-      </p:sp>
-    </p:spTree>
-  </p:cSld>
-  <p:clrMapOvr>
-    <a:masterClrMapping/>
-  </p:clrMapOvr>
-  <p:transition spd="med"/>
-</p:sldLayout>
-</file>
-
-<file path=ppt/slideLayouts/slideLayout18.xml><?xml version="1.0" encoding="utf-8"?>
-<p:sldLayout xmlns:a="http://schemas.openxmlformats.org/drawingml/2006/main" xmlns:r="http://schemas.openxmlformats.org/officeDocument/2006/relationships" xmlns:p="http://schemas.openxmlformats.org/presentationml/2006/main" showMasterSp="0" type="tx">
-  <p:cSld name="Title, 2 Content over Content">
-    <p:spTree>
-      <p:nvGrpSpPr>
-        <p:cNvPr id="1" name=""/>
-        <p:cNvGrpSpPr/>
-        <p:nvPr/>
-      </p:nvGrpSpPr>
-      <p:grpSpPr>
-        <a:xfrm>
-          <a:off x="0" y="0"/>
-          <a:ext cx="0" cy="0"/>
-          <a:chOff x="0" y="0"/>
-          <a:chExt cx="0" cy="0"/>
-        </a:xfrm>
-      </p:grpSpPr>
-      <p:sp>
-        <p:nvSpPr>
-          <p:cNvPr id="223" name="Rechteck 7"/>
-          <p:cNvSpPr/>
-          <p:nvPr/>
-        </p:nvSpPr>
-        <p:spPr>
-          <a:xfrm>
-            <a:off x="0" y="5259600"/>
-            <a:ext cx="13444816" cy="2299681"/>
-          </a:xfrm>
-          <a:prstGeom prst="rect">
-            <a:avLst/>
-          </a:prstGeom>
-          <a:gradFill>
-            <a:gsLst>
-              <a:gs pos="0">
-                <a:srgbClr val="FFDB89"/>
-              </a:gs>
-              <a:gs pos="100000">
-                <a:srgbClr val="FFFFFF"/>
-              </a:gs>
-            </a:gsLst>
-            <a:lin ang="16200000"/>
-          </a:gradFill>
-          <a:ln w="12700">
-            <a:miter lim="400000"/>
-          </a:ln>
-        </p:spPr>
-        <p:txBody>
-          <a:bodyPr lIns="0" tIns="0" rIns="0" bIns="0"/>
-          <a:lstStyle/>
-          <a:p>
-            <a:endParaRPr sz="1800"/>
-          </a:p>
-        </p:txBody>
-      </p:sp>
-      <p:pic>
-        <p:nvPicPr>
-          <p:cNvPr id="224" name="Grafik 9" descr="Grafik 9"/>
-          <p:cNvPicPr>
-            <a:picLocks noChangeAspect="1"/>
-          </p:cNvPicPr>
-          <p:nvPr/>
-        </p:nvPicPr>
-        <p:blipFill>
-          <a:blip r:embed="rId2"/>
-          <a:stretch>
-            <a:fillRect/>
-          </a:stretch>
-        </p:blipFill>
-        <p:spPr>
-          <a:xfrm>
-            <a:off x="9123595" y="256680"/>
-            <a:ext cx="4127707" cy="1568521"/>
-          </a:xfrm>
-          <a:prstGeom prst="rect">
-            <a:avLst/>
-          </a:prstGeom>
-          <a:ln w="12700">
-            <a:miter lim="400000"/>
-          </a:ln>
-        </p:spPr>
-      </p:pic>
-      <p:sp>
-        <p:nvSpPr>
-          <p:cNvPr id="225" name="Titeltext"/>
-          <p:cNvSpPr txBox="1">
-            <a:spLocks noGrp="1"/>
-          </p:cNvSpPr>
-          <p:nvPr>
-            <p:ph type="title"/>
-          </p:nvPr>
-        </p:nvSpPr>
-        <p:spPr>
-          <a:xfrm>
-            <a:off x="923883" y="402120"/>
-            <a:ext cx="11596089" cy="1460881"/>
-          </a:xfrm>
-          <a:prstGeom prst="rect">
-            <a:avLst/>
-          </a:prstGeom>
-        </p:spPr>
-        <p:txBody>
-          <a:bodyPr lIns="0" tIns="0" rIns="0" bIns="0">
-            <a:normAutofit/>
-          </a:bodyPr>
-          <a:lstStyle>
-            <a:lvl1pPr>
-              <a:lnSpc>
-                <a:spcPct val="100000"/>
-              </a:lnSpc>
-              <a:defRPr sz="1800" spc="0">
-                <a:latin typeface="+mn-lt"/>
-                <a:ea typeface="+mn-ea"/>
-                <a:cs typeface="+mn-cs"/>
-                <a:sym typeface="Helvetica"/>
-              </a:defRPr>
-            </a:lvl1pPr>
-          </a:lstStyle>
-          <a:p>
-            <a:r>
-              <a:t>Titeltext</a:t>
-            </a:r>
-          </a:p>
-        </p:txBody>
-      </p:sp>
-      <p:sp>
-        <p:nvSpPr>
-          <p:cNvPr id="226" name="Textebene 1…"/>
-          <p:cNvSpPr txBox="1">
-            <a:spLocks noGrp="1"/>
-          </p:cNvSpPr>
-          <p:nvPr>
-            <p:ph type="body" sz="quarter" idx="1"/>
-          </p:nvPr>
-        </p:nvSpPr>
-        <p:spPr>
-          <a:xfrm>
-            <a:off x="923883" y="2012401"/>
-            <a:ext cx="5658550" cy="2287801"/>
-          </a:xfrm>
-          <a:prstGeom prst="rect">
-            <a:avLst/>
-          </a:prstGeom>
-        </p:spPr>
-        <p:txBody>
-          <a:bodyPr lIns="0" tIns="0" rIns="0" bIns="0">
-            <a:normAutofit/>
-          </a:bodyPr>
-          <a:lstStyle>
-            <a:lvl1pPr marL="0" indent="0">
-              <a:lnSpc>
-                <a:spcPct val="100000"/>
-              </a:lnSpc>
-              <a:spcBef>
-                <a:spcPts val="0"/>
-              </a:spcBef>
-              <a:buClrTx/>
-              <a:buSzTx/>
-              <a:buFontTx/>
-              <a:buNone/>
-              <a:defRPr sz="1800" spc="0">
-                <a:latin typeface="+mn-lt"/>
-                <a:ea typeface="+mn-ea"/>
-                <a:cs typeface="+mn-cs"/>
-                <a:sym typeface="Helvetica"/>
-              </a:defRPr>
-            </a:lvl1pPr>
-            <a:lvl2pPr marL="0" indent="0">
-              <a:lnSpc>
-                <a:spcPct val="100000"/>
-              </a:lnSpc>
-              <a:spcBef>
-                <a:spcPts val="0"/>
-              </a:spcBef>
-              <a:buClrTx/>
-              <a:buSzTx/>
-              <a:buFontTx/>
-              <a:buNone/>
-              <a:defRPr sz="1800" spc="0">
-                <a:latin typeface="+mn-lt"/>
-                <a:ea typeface="+mn-ea"/>
-                <a:cs typeface="+mn-cs"/>
-                <a:sym typeface="Helvetica"/>
-              </a:defRPr>
-            </a:lvl2pPr>
-            <a:lvl3pPr marL="0" indent="0">
-              <a:lnSpc>
-                <a:spcPct val="100000"/>
-              </a:lnSpc>
-              <a:spcBef>
-                <a:spcPts val="0"/>
-              </a:spcBef>
-              <a:buClrTx/>
-              <a:buSzTx/>
-              <a:buFontTx/>
-              <a:buNone/>
-              <a:defRPr sz="1800" spc="0">
-                <a:latin typeface="+mn-lt"/>
-                <a:ea typeface="+mn-ea"/>
-                <a:cs typeface="+mn-cs"/>
-                <a:sym typeface="Helvetica"/>
-              </a:defRPr>
-            </a:lvl3pPr>
-            <a:lvl4pPr marL="0" indent="0">
-              <a:lnSpc>
-                <a:spcPct val="100000"/>
-              </a:lnSpc>
-              <a:spcBef>
-                <a:spcPts val="0"/>
-              </a:spcBef>
-              <a:buClrTx/>
-              <a:buSzTx/>
-              <a:buFontTx/>
-              <a:buNone/>
-              <a:defRPr sz="1800" spc="0">
-                <a:latin typeface="+mn-lt"/>
-                <a:ea typeface="+mn-ea"/>
-                <a:cs typeface="+mn-cs"/>
-                <a:sym typeface="Helvetica"/>
-              </a:defRPr>
-            </a:lvl4pPr>
-            <a:lvl5pPr marL="0" indent="0">
-              <a:lnSpc>
-                <a:spcPct val="100000"/>
-              </a:lnSpc>
-              <a:spcBef>
-                <a:spcPts val="0"/>
-              </a:spcBef>
-              <a:buClrTx/>
-              <a:buSzTx/>
-              <a:buFontTx/>
-              <a:buNone/>
-              <a:defRPr sz="1800" spc="0">
-                <a:latin typeface="+mn-lt"/>
-                <a:ea typeface="+mn-ea"/>
-                <a:cs typeface="+mn-cs"/>
-                <a:sym typeface="Helvetica"/>
-              </a:defRPr>
-            </a:lvl5pPr>
-          </a:lstStyle>
-          <a:p>
-            <a:r>
-              <a:t>Textebene 1</a:t>
-            </a:r>
-          </a:p>
-          <a:p>
-            <a:pPr lvl="1"/>
-            <a:r>
-              <a:t>Textebene 2</a:t>
-            </a:r>
-          </a:p>
-          <a:p>
-            <a:pPr lvl="2"/>
-            <a:r>
-              <a:t>Textebene 3</a:t>
-            </a:r>
-          </a:p>
-          <a:p>
-            <a:pPr lvl="3"/>
-            <a:r>
-              <a:t>Textebene 4</a:t>
-            </a:r>
-          </a:p>
-          <a:p>
-            <a:pPr lvl="4"/>
-            <a:r>
-              <a:t>Textebene 5</a:t>
-            </a:r>
-          </a:p>
-        </p:txBody>
-      </p:sp>
-      <p:sp>
-        <p:nvSpPr>
-          <p:cNvPr id="227" name="Foliennummer"/>
-          <p:cNvSpPr txBox="1">
-            <a:spLocks noGrp="1"/>
-          </p:cNvSpPr>
-          <p:nvPr>
-            <p:ph type="sldNum" sz="quarter" idx="2"/>
-          </p:nvPr>
-        </p:nvSpPr>
-        <p:spPr>
-          <a:prstGeom prst="rect">
-            <a:avLst/>
-          </a:prstGeom>
-        </p:spPr>
-        <p:txBody>
-          <a:bodyPr/>
-          <a:lstStyle/>
-          <a:p>
-            <a:fld id="{86CB4B4D-7CA3-9044-876B-883B54F8677D}" type="slidenum">
-              <a:t>‹Nr.›</a:t>
-            </a:fld>
-            <a:endParaRPr/>
-          </a:p>
-        </p:txBody>
-      </p:sp>
-    </p:spTree>
-  </p:cSld>
-  <p:clrMapOvr>
-    <a:masterClrMapping/>
-  </p:clrMapOvr>
-  <p:transition spd="med"/>
-</p:sldLayout>
-</file>
-
-<file path=ppt/slideLayouts/slideLayout19.xml><?xml version="1.0" encoding="utf-8"?>
-<p:sldLayout xmlns:a="http://schemas.openxmlformats.org/drawingml/2006/main" xmlns:r="http://schemas.openxmlformats.org/officeDocument/2006/relationships" xmlns:p="http://schemas.openxmlformats.org/presentationml/2006/main" showMasterSp="0" type="tx">
-  <p:cSld name="Title, Content over Content">
-    <p:spTree>
-      <p:nvGrpSpPr>
-        <p:cNvPr id="1" name=""/>
-        <p:cNvGrpSpPr/>
-        <p:nvPr/>
-      </p:nvGrpSpPr>
-      <p:grpSpPr>
-        <a:xfrm>
-          <a:off x="0" y="0"/>
-          <a:ext cx="0" cy="0"/>
-          <a:chOff x="0" y="0"/>
-          <a:chExt cx="0" cy="0"/>
-        </a:xfrm>
-      </p:grpSpPr>
-      <p:sp>
-        <p:nvSpPr>
-          <p:cNvPr id="234" name="Rechteck 7"/>
-          <p:cNvSpPr/>
-          <p:nvPr/>
-        </p:nvSpPr>
-        <p:spPr>
-          <a:xfrm>
-            <a:off x="0" y="5259600"/>
-            <a:ext cx="13444816" cy="2299681"/>
-          </a:xfrm>
-          <a:prstGeom prst="rect">
-            <a:avLst/>
-          </a:prstGeom>
-          <a:gradFill>
-            <a:gsLst>
-              <a:gs pos="0">
-                <a:srgbClr val="FFDB89"/>
-              </a:gs>
-              <a:gs pos="100000">
-                <a:srgbClr val="FFFFFF"/>
-              </a:gs>
-            </a:gsLst>
-            <a:lin ang="16200000"/>
-          </a:gradFill>
-          <a:ln w="12700">
-            <a:miter lim="400000"/>
-          </a:ln>
-        </p:spPr>
-        <p:txBody>
-          <a:bodyPr lIns="0" tIns="0" rIns="0" bIns="0"/>
-          <a:lstStyle/>
-          <a:p>
-            <a:endParaRPr sz="1800"/>
-          </a:p>
-        </p:txBody>
-      </p:sp>
-      <p:pic>
-        <p:nvPicPr>
-          <p:cNvPr id="235" name="Grafik 9" descr="Grafik 9"/>
-          <p:cNvPicPr>
-            <a:picLocks noChangeAspect="1"/>
-          </p:cNvPicPr>
-          <p:nvPr/>
-        </p:nvPicPr>
-        <p:blipFill>
-          <a:blip r:embed="rId2"/>
-          <a:stretch>
-            <a:fillRect/>
-          </a:stretch>
-        </p:blipFill>
-        <p:spPr>
-          <a:xfrm>
-            <a:off x="9123595" y="256680"/>
-            <a:ext cx="4127707" cy="1568521"/>
-          </a:xfrm>
-          <a:prstGeom prst="rect">
-            <a:avLst/>
-          </a:prstGeom>
-          <a:ln w="12700">
-            <a:miter lim="400000"/>
-          </a:ln>
-        </p:spPr>
-      </p:pic>
-      <p:sp>
-        <p:nvSpPr>
-          <p:cNvPr id="236" name="Titeltext"/>
-          <p:cNvSpPr txBox="1">
-            <a:spLocks noGrp="1"/>
-          </p:cNvSpPr>
-          <p:nvPr>
-            <p:ph type="title"/>
-          </p:nvPr>
-        </p:nvSpPr>
-        <p:spPr>
-          <a:xfrm>
-            <a:off x="923883" y="402120"/>
-            <a:ext cx="11596089" cy="1460881"/>
-          </a:xfrm>
-          <a:prstGeom prst="rect">
-            <a:avLst/>
-          </a:prstGeom>
-        </p:spPr>
-        <p:txBody>
-          <a:bodyPr lIns="0" tIns="0" rIns="0" bIns="0">
-            <a:normAutofit/>
-          </a:bodyPr>
-          <a:lstStyle>
-            <a:lvl1pPr>
-              <a:lnSpc>
-                <a:spcPct val="100000"/>
-              </a:lnSpc>
-              <a:defRPr sz="1800" spc="0">
-                <a:latin typeface="+mn-lt"/>
-                <a:ea typeface="+mn-ea"/>
-                <a:cs typeface="+mn-cs"/>
-                <a:sym typeface="Helvetica"/>
-              </a:defRPr>
-            </a:lvl1pPr>
-          </a:lstStyle>
-          <a:p>
-            <a:r>
-              <a:t>Titeltext</a:t>
-            </a:r>
-          </a:p>
-        </p:txBody>
-      </p:sp>
-      <p:sp>
-        <p:nvSpPr>
-          <p:cNvPr id="237" name="Textebene 1…"/>
-          <p:cNvSpPr txBox="1">
-            <a:spLocks noGrp="1"/>
-          </p:cNvSpPr>
-          <p:nvPr>
-            <p:ph type="body" sz="half" idx="1"/>
-          </p:nvPr>
-        </p:nvSpPr>
-        <p:spPr>
-          <a:xfrm>
-            <a:off x="923883" y="2012401"/>
-            <a:ext cx="11596089" cy="2287801"/>
-          </a:xfrm>
-          <a:prstGeom prst="rect">
-            <a:avLst/>
-          </a:prstGeom>
-        </p:spPr>
-        <p:txBody>
-          <a:bodyPr lIns="0" tIns="0" rIns="0" bIns="0">
-            <a:normAutofit/>
-          </a:bodyPr>
-          <a:lstStyle>
-            <a:lvl1pPr marL="0" indent="0">
-              <a:lnSpc>
-                <a:spcPct val="100000"/>
-              </a:lnSpc>
-              <a:spcBef>
-                <a:spcPts val="0"/>
-              </a:spcBef>
-              <a:buClrTx/>
-              <a:buSzTx/>
-              <a:buFontTx/>
-              <a:buNone/>
-              <a:defRPr sz="1800" spc="0">
-                <a:latin typeface="+mn-lt"/>
-                <a:ea typeface="+mn-ea"/>
-                <a:cs typeface="+mn-cs"/>
-                <a:sym typeface="Helvetica"/>
-              </a:defRPr>
-            </a:lvl1pPr>
-            <a:lvl2pPr marL="0" indent="0">
-              <a:lnSpc>
-                <a:spcPct val="100000"/>
-              </a:lnSpc>
-              <a:spcBef>
-                <a:spcPts val="0"/>
-              </a:spcBef>
-              <a:buClrTx/>
-              <a:buSzTx/>
-              <a:buFontTx/>
-              <a:buNone/>
-              <a:defRPr sz="1800" spc="0">
-                <a:latin typeface="+mn-lt"/>
-                <a:ea typeface="+mn-ea"/>
-                <a:cs typeface="+mn-cs"/>
-                <a:sym typeface="Helvetica"/>
-              </a:defRPr>
-            </a:lvl2pPr>
-            <a:lvl3pPr marL="0" indent="0">
-              <a:lnSpc>
-                <a:spcPct val="100000"/>
-              </a:lnSpc>
-              <a:spcBef>
-                <a:spcPts val="0"/>
-              </a:spcBef>
-              <a:buClrTx/>
-              <a:buSzTx/>
-              <a:buFontTx/>
-              <a:buNone/>
-              <a:defRPr sz="1800" spc="0">
-                <a:latin typeface="+mn-lt"/>
-                <a:ea typeface="+mn-ea"/>
-                <a:cs typeface="+mn-cs"/>
-                <a:sym typeface="Helvetica"/>
-              </a:defRPr>
-            </a:lvl3pPr>
-            <a:lvl4pPr marL="0" indent="0">
-              <a:lnSpc>
-                <a:spcPct val="100000"/>
-              </a:lnSpc>
-              <a:spcBef>
-                <a:spcPts val="0"/>
-              </a:spcBef>
-              <a:buClrTx/>
-              <a:buSzTx/>
-              <a:buFontTx/>
-              <a:buNone/>
-              <a:defRPr sz="1800" spc="0">
-                <a:latin typeface="+mn-lt"/>
-                <a:ea typeface="+mn-ea"/>
-                <a:cs typeface="+mn-cs"/>
-                <a:sym typeface="Helvetica"/>
-              </a:defRPr>
-            </a:lvl4pPr>
-            <a:lvl5pPr marL="0" indent="0">
-              <a:lnSpc>
-                <a:spcPct val="100000"/>
-              </a:lnSpc>
-              <a:spcBef>
-                <a:spcPts val="0"/>
-              </a:spcBef>
-              <a:buClrTx/>
-              <a:buSzTx/>
-              <a:buFontTx/>
-              <a:buNone/>
-              <a:defRPr sz="1800" spc="0">
-                <a:latin typeface="+mn-lt"/>
-                <a:ea typeface="+mn-ea"/>
-                <a:cs typeface="+mn-cs"/>
-                <a:sym typeface="Helvetica"/>
-              </a:defRPr>
-            </a:lvl5pPr>
-          </a:lstStyle>
-          <a:p>
-            <a:r>
-              <a:t>Textebene 1</a:t>
-            </a:r>
-          </a:p>
-          <a:p>
-            <a:pPr lvl="1"/>
-            <a:r>
-              <a:t>Textebene 2</a:t>
-            </a:r>
-          </a:p>
-          <a:p>
-            <a:pPr lvl="2"/>
-            <a:r>
-              <a:t>Textebene 3</a:t>
-            </a:r>
-          </a:p>
-          <a:p>
-            <a:pPr lvl="3"/>
-            <a:r>
-              <a:t>Textebene 4</a:t>
-            </a:r>
-          </a:p>
-          <a:p>
-            <a:pPr lvl="4"/>
-            <a:r>
-              <a:t>Textebene 5</a:t>
-            </a:r>
-          </a:p>
-        </p:txBody>
-      </p:sp>
-      <p:sp>
-        <p:nvSpPr>
-          <p:cNvPr id="238" name="Foliennummer"/>
           <p:cNvSpPr txBox="1">
             <a:spLocks noGrp="1"/>
           </p:cNvSpPr>
@@ -3575,8 +799,10 @@
           <a:lstStyle/>
           <a:p>
             <a:r>
-              <a:t>Titeltext</a:t>
+              <a:rPr lang="de-DE"/>
+              <a:t>Mastertitelformat bearbeiten</a:t>
             </a:r>
+            <a:endParaRPr/>
           </a:p>
         </p:txBody>
       </p:sp>
@@ -3592,8 +818,8 @@
         </p:nvSpPr>
         <p:spPr>
           <a:xfrm>
-            <a:off x="923883" y="2012401"/>
-            <a:ext cx="5658550" cy="4796281"/>
+            <a:off x="923883" y="2296900"/>
+            <a:ext cx="5658550" cy="4511782"/>
           </a:xfrm>
           <a:prstGeom prst="rect">
             <a:avLst/>
@@ -3605,33 +831,40 @@
           </a:bodyPr>
           <a:lstStyle/>
           <a:p>
+            <a:pPr lvl="0"/>
             <a:r>
-              <a:t>Textebene 1</a:t>
+              <a:rPr lang="de-DE"/>
+              <a:t>Mastertextformat bearbeiten</a:t>
             </a:r>
           </a:p>
           <a:p>
             <a:pPr lvl="1"/>
             <a:r>
-              <a:t>Textebene 2</a:t>
+              <a:rPr lang="de-DE"/>
+              <a:t>Zweite Ebene</a:t>
             </a:r>
           </a:p>
           <a:p>
             <a:pPr lvl="2"/>
             <a:r>
-              <a:t>Textebene 3</a:t>
+              <a:rPr lang="de-DE"/>
+              <a:t>Dritte Ebene</a:t>
             </a:r>
           </a:p>
           <a:p>
             <a:pPr lvl="3"/>
             <a:r>
-              <a:t>Textebene 4</a:t>
+              <a:rPr lang="de-DE"/>
+              <a:t>Vierte Ebene</a:t>
             </a:r>
           </a:p>
           <a:p>
             <a:pPr lvl="4"/>
             <a:r>
-              <a:t>Textebene 5</a:t>
+              <a:rPr lang="de-DE"/>
+              <a:t>Fünfte Ebene</a:t>
             </a:r>
+            <a:endParaRPr/>
           </a:p>
         </p:txBody>
       </p:sp>
@@ -3670,619 +903,9 @@
 </p:sldLayout>
 </file>
 
-<file path=ppt/slideLayouts/slideLayout20.xml><?xml version="1.0" encoding="utf-8"?>
-<p:sldLayout xmlns:a="http://schemas.openxmlformats.org/drawingml/2006/main" xmlns:r="http://schemas.openxmlformats.org/officeDocument/2006/relationships" xmlns:p="http://schemas.openxmlformats.org/presentationml/2006/main" showMasterSp="0" type="tx">
-  <p:cSld name="Title, 4 Content">
-    <p:spTree>
-      <p:nvGrpSpPr>
-        <p:cNvPr id="1" name=""/>
-        <p:cNvGrpSpPr/>
-        <p:nvPr/>
-      </p:nvGrpSpPr>
-      <p:grpSpPr>
-        <a:xfrm>
-          <a:off x="0" y="0"/>
-          <a:ext cx="0" cy="0"/>
-          <a:chOff x="0" y="0"/>
-          <a:chExt cx="0" cy="0"/>
-        </a:xfrm>
-      </p:grpSpPr>
-      <p:sp>
-        <p:nvSpPr>
-          <p:cNvPr id="245" name="Rechteck 7"/>
-          <p:cNvSpPr/>
-          <p:nvPr/>
-        </p:nvSpPr>
-        <p:spPr>
-          <a:xfrm>
-            <a:off x="0" y="5259600"/>
-            <a:ext cx="13444816" cy="2299681"/>
-          </a:xfrm>
-          <a:prstGeom prst="rect">
-            <a:avLst/>
-          </a:prstGeom>
-          <a:gradFill>
-            <a:gsLst>
-              <a:gs pos="0">
-                <a:srgbClr val="FFDB89"/>
-              </a:gs>
-              <a:gs pos="100000">
-                <a:srgbClr val="FFFFFF"/>
-              </a:gs>
-            </a:gsLst>
-            <a:lin ang="16200000"/>
-          </a:gradFill>
-          <a:ln w="12700">
-            <a:miter lim="400000"/>
-          </a:ln>
-        </p:spPr>
-        <p:txBody>
-          <a:bodyPr lIns="0" tIns="0" rIns="0" bIns="0"/>
-          <a:lstStyle/>
-          <a:p>
-            <a:endParaRPr sz="1800"/>
-          </a:p>
-        </p:txBody>
-      </p:sp>
-      <p:pic>
-        <p:nvPicPr>
-          <p:cNvPr id="246" name="Grafik 9" descr="Grafik 9"/>
-          <p:cNvPicPr>
-            <a:picLocks noChangeAspect="1"/>
-          </p:cNvPicPr>
-          <p:nvPr/>
-        </p:nvPicPr>
-        <p:blipFill>
-          <a:blip r:embed="rId2"/>
-          <a:stretch>
-            <a:fillRect/>
-          </a:stretch>
-        </p:blipFill>
-        <p:spPr>
-          <a:xfrm>
-            <a:off x="9123595" y="256680"/>
-            <a:ext cx="4127707" cy="1568521"/>
-          </a:xfrm>
-          <a:prstGeom prst="rect">
-            <a:avLst/>
-          </a:prstGeom>
-          <a:ln w="12700">
-            <a:miter lim="400000"/>
-          </a:ln>
-        </p:spPr>
-      </p:pic>
-      <p:sp>
-        <p:nvSpPr>
-          <p:cNvPr id="247" name="Titeltext"/>
-          <p:cNvSpPr txBox="1">
-            <a:spLocks noGrp="1"/>
-          </p:cNvSpPr>
-          <p:nvPr>
-            <p:ph type="title"/>
-          </p:nvPr>
-        </p:nvSpPr>
-        <p:spPr>
-          <a:xfrm>
-            <a:off x="923883" y="402120"/>
-            <a:ext cx="11596089" cy="1460881"/>
-          </a:xfrm>
-          <a:prstGeom prst="rect">
-            <a:avLst/>
-          </a:prstGeom>
-        </p:spPr>
-        <p:txBody>
-          <a:bodyPr lIns="0" tIns="0" rIns="0" bIns="0">
-            <a:normAutofit/>
-          </a:bodyPr>
-          <a:lstStyle>
-            <a:lvl1pPr>
-              <a:lnSpc>
-                <a:spcPct val="100000"/>
-              </a:lnSpc>
-              <a:defRPr sz="1800" spc="0">
-                <a:latin typeface="+mn-lt"/>
-                <a:ea typeface="+mn-ea"/>
-                <a:cs typeface="+mn-cs"/>
-                <a:sym typeface="Helvetica"/>
-              </a:defRPr>
-            </a:lvl1pPr>
-          </a:lstStyle>
-          <a:p>
-            <a:r>
-              <a:t>Titeltext</a:t>
-            </a:r>
-          </a:p>
-        </p:txBody>
-      </p:sp>
-      <p:sp>
-        <p:nvSpPr>
-          <p:cNvPr id="248" name="Textebene 1…"/>
-          <p:cNvSpPr txBox="1">
-            <a:spLocks noGrp="1"/>
-          </p:cNvSpPr>
-          <p:nvPr>
-            <p:ph type="body" sz="quarter" idx="1"/>
-          </p:nvPr>
-        </p:nvSpPr>
-        <p:spPr>
-          <a:xfrm>
-            <a:off x="923883" y="2012401"/>
-            <a:ext cx="5658550" cy="2287801"/>
-          </a:xfrm>
-          <a:prstGeom prst="rect">
-            <a:avLst/>
-          </a:prstGeom>
-        </p:spPr>
-        <p:txBody>
-          <a:bodyPr lIns="0" tIns="0" rIns="0" bIns="0">
-            <a:normAutofit/>
-          </a:bodyPr>
-          <a:lstStyle>
-            <a:lvl1pPr marL="0" indent="0">
-              <a:lnSpc>
-                <a:spcPct val="100000"/>
-              </a:lnSpc>
-              <a:spcBef>
-                <a:spcPts val="0"/>
-              </a:spcBef>
-              <a:buClrTx/>
-              <a:buSzTx/>
-              <a:buFontTx/>
-              <a:buNone/>
-              <a:defRPr sz="1800" spc="0">
-                <a:latin typeface="+mn-lt"/>
-                <a:ea typeface="+mn-ea"/>
-                <a:cs typeface="+mn-cs"/>
-                <a:sym typeface="Helvetica"/>
-              </a:defRPr>
-            </a:lvl1pPr>
-            <a:lvl2pPr marL="0" indent="0">
-              <a:lnSpc>
-                <a:spcPct val="100000"/>
-              </a:lnSpc>
-              <a:spcBef>
-                <a:spcPts val="0"/>
-              </a:spcBef>
-              <a:buClrTx/>
-              <a:buSzTx/>
-              <a:buFontTx/>
-              <a:buNone/>
-              <a:defRPr sz="1800" spc="0">
-                <a:latin typeface="+mn-lt"/>
-                <a:ea typeface="+mn-ea"/>
-                <a:cs typeface="+mn-cs"/>
-                <a:sym typeface="Helvetica"/>
-              </a:defRPr>
-            </a:lvl2pPr>
-            <a:lvl3pPr marL="0" indent="0">
-              <a:lnSpc>
-                <a:spcPct val="100000"/>
-              </a:lnSpc>
-              <a:spcBef>
-                <a:spcPts val="0"/>
-              </a:spcBef>
-              <a:buClrTx/>
-              <a:buSzTx/>
-              <a:buFontTx/>
-              <a:buNone/>
-              <a:defRPr sz="1800" spc="0">
-                <a:latin typeface="+mn-lt"/>
-                <a:ea typeface="+mn-ea"/>
-                <a:cs typeface="+mn-cs"/>
-                <a:sym typeface="Helvetica"/>
-              </a:defRPr>
-            </a:lvl3pPr>
-            <a:lvl4pPr marL="0" indent="0">
-              <a:lnSpc>
-                <a:spcPct val="100000"/>
-              </a:lnSpc>
-              <a:spcBef>
-                <a:spcPts val="0"/>
-              </a:spcBef>
-              <a:buClrTx/>
-              <a:buSzTx/>
-              <a:buFontTx/>
-              <a:buNone/>
-              <a:defRPr sz="1800" spc="0">
-                <a:latin typeface="+mn-lt"/>
-                <a:ea typeface="+mn-ea"/>
-                <a:cs typeface="+mn-cs"/>
-                <a:sym typeface="Helvetica"/>
-              </a:defRPr>
-            </a:lvl4pPr>
-            <a:lvl5pPr marL="0" indent="0">
-              <a:lnSpc>
-                <a:spcPct val="100000"/>
-              </a:lnSpc>
-              <a:spcBef>
-                <a:spcPts val="0"/>
-              </a:spcBef>
-              <a:buClrTx/>
-              <a:buSzTx/>
-              <a:buFontTx/>
-              <a:buNone/>
-              <a:defRPr sz="1800" spc="0">
-                <a:latin typeface="+mn-lt"/>
-                <a:ea typeface="+mn-ea"/>
-                <a:cs typeface="+mn-cs"/>
-                <a:sym typeface="Helvetica"/>
-              </a:defRPr>
-            </a:lvl5pPr>
-          </a:lstStyle>
-          <a:p>
-            <a:r>
-              <a:t>Textebene 1</a:t>
-            </a:r>
-          </a:p>
-          <a:p>
-            <a:pPr lvl="1"/>
-            <a:r>
-              <a:t>Textebene 2</a:t>
-            </a:r>
-          </a:p>
-          <a:p>
-            <a:pPr lvl="2"/>
-            <a:r>
-              <a:t>Textebene 3</a:t>
-            </a:r>
-          </a:p>
-          <a:p>
-            <a:pPr lvl="3"/>
-            <a:r>
-              <a:t>Textebene 4</a:t>
-            </a:r>
-          </a:p>
-          <a:p>
-            <a:pPr lvl="4"/>
-            <a:r>
-              <a:t>Textebene 5</a:t>
-            </a:r>
-          </a:p>
-        </p:txBody>
-      </p:sp>
-      <p:sp>
-        <p:nvSpPr>
-          <p:cNvPr id="249" name="Foliennummer"/>
-          <p:cNvSpPr txBox="1">
-            <a:spLocks noGrp="1"/>
-          </p:cNvSpPr>
-          <p:nvPr>
-            <p:ph type="sldNum" sz="quarter" idx="2"/>
-          </p:nvPr>
-        </p:nvSpPr>
-        <p:spPr>
-          <a:prstGeom prst="rect">
-            <a:avLst/>
-          </a:prstGeom>
-        </p:spPr>
-        <p:txBody>
-          <a:bodyPr/>
-          <a:lstStyle/>
-          <a:p>
-            <a:fld id="{86CB4B4D-7CA3-9044-876B-883B54F8677D}" type="slidenum">
-              <a:t>‹Nr.›</a:t>
-            </a:fld>
-            <a:endParaRPr/>
-          </a:p>
-        </p:txBody>
-      </p:sp>
-    </p:spTree>
-  </p:cSld>
-  <p:clrMapOvr>
-    <a:masterClrMapping/>
-  </p:clrMapOvr>
-  <p:transition spd="med"/>
-</p:sldLayout>
-</file>
-
-<file path=ppt/slideLayouts/slideLayout21.xml><?xml version="1.0" encoding="utf-8"?>
-<p:sldLayout xmlns:a="http://schemas.openxmlformats.org/drawingml/2006/main" xmlns:r="http://schemas.openxmlformats.org/officeDocument/2006/relationships" xmlns:p="http://schemas.openxmlformats.org/presentationml/2006/main" showMasterSp="0" type="tx">
-  <p:cSld name="Title, 6 Content">
-    <p:spTree>
-      <p:nvGrpSpPr>
-        <p:cNvPr id="1" name=""/>
-        <p:cNvGrpSpPr/>
-        <p:nvPr/>
-      </p:nvGrpSpPr>
-      <p:grpSpPr>
-        <a:xfrm>
-          <a:off x="0" y="0"/>
-          <a:ext cx="0" cy="0"/>
-          <a:chOff x="0" y="0"/>
-          <a:chExt cx="0" cy="0"/>
-        </a:xfrm>
-      </p:grpSpPr>
-      <p:sp>
-        <p:nvSpPr>
-          <p:cNvPr id="256" name="Rechteck 7"/>
-          <p:cNvSpPr/>
-          <p:nvPr/>
-        </p:nvSpPr>
-        <p:spPr>
-          <a:xfrm>
-            <a:off x="0" y="5259600"/>
-            <a:ext cx="13444816" cy="2299681"/>
-          </a:xfrm>
-          <a:prstGeom prst="rect">
-            <a:avLst/>
-          </a:prstGeom>
-          <a:gradFill>
-            <a:gsLst>
-              <a:gs pos="0">
-                <a:srgbClr val="FFDB89"/>
-              </a:gs>
-              <a:gs pos="100000">
-                <a:srgbClr val="FFFFFF"/>
-              </a:gs>
-            </a:gsLst>
-            <a:lin ang="16200000"/>
-          </a:gradFill>
-          <a:ln w="12700">
-            <a:miter lim="400000"/>
-          </a:ln>
-        </p:spPr>
-        <p:txBody>
-          <a:bodyPr lIns="0" tIns="0" rIns="0" bIns="0"/>
-          <a:lstStyle/>
-          <a:p>
-            <a:endParaRPr sz="1800"/>
-          </a:p>
-        </p:txBody>
-      </p:sp>
-      <p:pic>
-        <p:nvPicPr>
-          <p:cNvPr id="257" name="Grafik 9" descr="Grafik 9"/>
-          <p:cNvPicPr>
-            <a:picLocks noChangeAspect="1"/>
-          </p:cNvPicPr>
-          <p:nvPr/>
-        </p:nvPicPr>
-        <p:blipFill>
-          <a:blip r:embed="rId2"/>
-          <a:stretch>
-            <a:fillRect/>
-          </a:stretch>
-        </p:blipFill>
-        <p:spPr>
-          <a:xfrm>
-            <a:off x="9123595" y="256680"/>
-            <a:ext cx="4127707" cy="1568521"/>
-          </a:xfrm>
-          <a:prstGeom prst="rect">
-            <a:avLst/>
-          </a:prstGeom>
-          <a:ln w="12700">
-            <a:miter lim="400000"/>
-          </a:ln>
-        </p:spPr>
-      </p:pic>
-      <p:sp>
-        <p:nvSpPr>
-          <p:cNvPr id="258" name="Titeltext"/>
-          <p:cNvSpPr txBox="1">
-            <a:spLocks noGrp="1"/>
-          </p:cNvSpPr>
-          <p:nvPr>
-            <p:ph type="title"/>
-          </p:nvPr>
-        </p:nvSpPr>
-        <p:spPr>
-          <a:xfrm>
-            <a:off x="923883" y="402120"/>
-            <a:ext cx="11596089" cy="1460881"/>
-          </a:xfrm>
-          <a:prstGeom prst="rect">
-            <a:avLst/>
-          </a:prstGeom>
-        </p:spPr>
-        <p:txBody>
-          <a:bodyPr lIns="0" tIns="0" rIns="0" bIns="0">
-            <a:normAutofit/>
-          </a:bodyPr>
-          <a:lstStyle>
-            <a:lvl1pPr>
-              <a:lnSpc>
-                <a:spcPct val="100000"/>
-              </a:lnSpc>
-              <a:defRPr sz="1800" spc="0">
-                <a:latin typeface="+mn-lt"/>
-                <a:ea typeface="+mn-ea"/>
-                <a:cs typeface="+mn-cs"/>
-                <a:sym typeface="Helvetica"/>
-              </a:defRPr>
-            </a:lvl1pPr>
-          </a:lstStyle>
-          <a:p>
-            <a:r>
-              <a:t>Titeltext</a:t>
-            </a:r>
-          </a:p>
-        </p:txBody>
-      </p:sp>
-      <p:sp>
-        <p:nvSpPr>
-          <p:cNvPr id="259" name="Textebene 1…"/>
-          <p:cNvSpPr txBox="1">
-            <a:spLocks noGrp="1"/>
-          </p:cNvSpPr>
-          <p:nvPr>
-            <p:ph type="body" sz="quarter" idx="1"/>
-          </p:nvPr>
-        </p:nvSpPr>
-        <p:spPr>
-          <a:xfrm>
-            <a:off x="923883" y="2012401"/>
-            <a:ext cx="3733473" cy="2287801"/>
-          </a:xfrm>
-          <a:prstGeom prst="rect">
-            <a:avLst/>
-          </a:prstGeom>
-        </p:spPr>
-        <p:txBody>
-          <a:bodyPr lIns="0" tIns="0" rIns="0" bIns="0">
-            <a:normAutofit/>
-          </a:bodyPr>
-          <a:lstStyle>
-            <a:lvl1pPr marL="0" indent="0">
-              <a:lnSpc>
-                <a:spcPct val="100000"/>
-              </a:lnSpc>
-              <a:spcBef>
-                <a:spcPts val="0"/>
-              </a:spcBef>
-              <a:buClrTx/>
-              <a:buSzTx/>
-              <a:buFontTx/>
-              <a:buNone/>
-              <a:defRPr sz="1800" spc="0">
-                <a:latin typeface="+mn-lt"/>
-                <a:ea typeface="+mn-ea"/>
-                <a:cs typeface="+mn-cs"/>
-                <a:sym typeface="Helvetica"/>
-              </a:defRPr>
-            </a:lvl1pPr>
-            <a:lvl2pPr marL="0" indent="0">
-              <a:lnSpc>
-                <a:spcPct val="100000"/>
-              </a:lnSpc>
-              <a:spcBef>
-                <a:spcPts val="0"/>
-              </a:spcBef>
-              <a:buClrTx/>
-              <a:buSzTx/>
-              <a:buFontTx/>
-              <a:buNone/>
-              <a:defRPr sz="1800" spc="0">
-                <a:latin typeface="+mn-lt"/>
-                <a:ea typeface="+mn-ea"/>
-                <a:cs typeface="+mn-cs"/>
-                <a:sym typeface="Helvetica"/>
-              </a:defRPr>
-            </a:lvl2pPr>
-            <a:lvl3pPr marL="0" indent="0">
-              <a:lnSpc>
-                <a:spcPct val="100000"/>
-              </a:lnSpc>
-              <a:spcBef>
-                <a:spcPts val="0"/>
-              </a:spcBef>
-              <a:buClrTx/>
-              <a:buSzTx/>
-              <a:buFontTx/>
-              <a:buNone/>
-              <a:defRPr sz="1800" spc="0">
-                <a:latin typeface="+mn-lt"/>
-                <a:ea typeface="+mn-ea"/>
-                <a:cs typeface="+mn-cs"/>
-                <a:sym typeface="Helvetica"/>
-              </a:defRPr>
-            </a:lvl3pPr>
-            <a:lvl4pPr marL="0" indent="0">
-              <a:lnSpc>
-                <a:spcPct val="100000"/>
-              </a:lnSpc>
-              <a:spcBef>
-                <a:spcPts val="0"/>
-              </a:spcBef>
-              <a:buClrTx/>
-              <a:buSzTx/>
-              <a:buFontTx/>
-              <a:buNone/>
-              <a:defRPr sz="1800" spc="0">
-                <a:latin typeface="+mn-lt"/>
-                <a:ea typeface="+mn-ea"/>
-                <a:cs typeface="+mn-cs"/>
-                <a:sym typeface="Helvetica"/>
-              </a:defRPr>
-            </a:lvl4pPr>
-            <a:lvl5pPr marL="0" indent="0">
-              <a:lnSpc>
-                <a:spcPct val="100000"/>
-              </a:lnSpc>
-              <a:spcBef>
-                <a:spcPts val="0"/>
-              </a:spcBef>
-              <a:buClrTx/>
-              <a:buSzTx/>
-              <a:buFontTx/>
-              <a:buNone/>
-              <a:defRPr sz="1800" spc="0">
-                <a:latin typeface="+mn-lt"/>
-                <a:ea typeface="+mn-ea"/>
-                <a:cs typeface="+mn-cs"/>
-                <a:sym typeface="Helvetica"/>
-              </a:defRPr>
-            </a:lvl5pPr>
-          </a:lstStyle>
-          <a:p>
-            <a:r>
-              <a:t>Textebene 1</a:t>
-            </a:r>
-          </a:p>
-          <a:p>
-            <a:pPr lvl="1"/>
-            <a:r>
-              <a:t>Textebene 2</a:t>
-            </a:r>
-          </a:p>
-          <a:p>
-            <a:pPr lvl="2"/>
-            <a:r>
-              <a:t>Textebene 3</a:t>
-            </a:r>
-          </a:p>
-          <a:p>
-            <a:pPr lvl="3"/>
-            <a:r>
-              <a:t>Textebene 4</a:t>
-            </a:r>
-          </a:p>
-          <a:p>
-            <a:pPr lvl="4"/>
-            <a:r>
-              <a:t>Textebene 5</a:t>
-            </a:r>
-          </a:p>
-        </p:txBody>
-      </p:sp>
-      <p:sp>
-        <p:nvSpPr>
-          <p:cNvPr id="260" name="Foliennummer"/>
-          <p:cNvSpPr txBox="1">
-            <a:spLocks noGrp="1"/>
-          </p:cNvSpPr>
-          <p:nvPr>
-            <p:ph type="sldNum" sz="quarter" idx="2"/>
-          </p:nvPr>
-        </p:nvSpPr>
-        <p:spPr>
-          <a:prstGeom prst="rect">
-            <a:avLst/>
-          </a:prstGeom>
-        </p:spPr>
-        <p:txBody>
-          <a:bodyPr/>
-          <a:lstStyle/>
-          <a:p>
-            <a:fld id="{86CB4B4D-7CA3-9044-876B-883B54F8677D}" type="slidenum">
-              <a:t>‹Nr.›</a:t>
-            </a:fld>
-            <a:endParaRPr/>
-          </a:p>
-        </p:txBody>
-      </p:sp>
-    </p:spTree>
-  </p:cSld>
-  <p:clrMapOvr>
-    <a:masterClrMapping/>
-  </p:clrMapOvr>
-  <p:transition spd="med"/>
-</p:sldLayout>
-</file>
-
 <file path=ppt/slideLayouts/slideLayout3.xml><?xml version="1.0" encoding="utf-8"?>
 <p:sldLayout xmlns:a="http://schemas.openxmlformats.org/drawingml/2006/main" xmlns:r="http://schemas.openxmlformats.org/officeDocument/2006/relationships" xmlns:p="http://schemas.openxmlformats.org/presentationml/2006/main" showMasterSp="0" type="tx">
-  <p:cSld name="Title Only">
+  <p:cSld name="Nur Titel">
     <p:spTree>
       <p:nvGrpSpPr>
         <p:cNvPr id="1" name=""/>
@@ -4387,8 +1010,10 @@
           <a:lstStyle/>
           <a:p>
             <a:r>
-              <a:t>Titeltext</a:t>
+              <a:rPr lang="de-DE"/>
+              <a:t>Mastertitelformat bearbeiten</a:t>
             </a:r>
+            <a:endParaRPr/>
           </a:p>
         </p:txBody>
       </p:sp>
@@ -4533,33 +1158,40 @@
           </a:bodyPr>
           <a:lstStyle/>
           <a:p>
+            <a:pPr lvl="0"/>
             <a:r>
-              <a:t>Textebene 1</a:t>
+              <a:rPr lang="de-DE"/>
+              <a:t>Mastertextformat bearbeiten</a:t>
             </a:r>
           </a:p>
           <a:p>
             <a:pPr lvl="1"/>
             <a:r>
-              <a:t>Textebene 2</a:t>
+              <a:rPr lang="de-DE"/>
+              <a:t>Zweite Ebene</a:t>
             </a:r>
           </a:p>
           <a:p>
             <a:pPr lvl="2"/>
             <a:r>
-              <a:t>Textebene 3</a:t>
+              <a:rPr lang="de-DE"/>
+              <a:t>Dritte Ebene</a:t>
             </a:r>
           </a:p>
           <a:p>
             <a:pPr lvl="3"/>
             <a:r>
-              <a:t>Textebene 4</a:t>
+              <a:rPr lang="de-DE"/>
+              <a:t>Vierte Ebene</a:t>
             </a:r>
           </a:p>
           <a:p>
             <a:pPr lvl="4"/>
             <a:r>
-              <a:t>Textebene 5</a:t>
+              <a:rPr lang="de-DE"/>
+              <a:t>Fünfte Ebene</a:t>
             </a:r>
+            <a:endParaRPr/>
           </a:p>
         </p:txBody>
       </p:sp>
@@ -4600,7 +1232,7 @@
 
 <file path=ppt/slideLayouts/slideLayout5.xml><?xml version="1.0" encoding="utf-8"?>
 <p:sldLayout xmlns:a="http://schemas.openxmlformats.org/drawingml/2006/main" xmlns:r="http://schemas.openxmlformats.org/officeDocument/2006/relationships" xmlns:p="http://schemas.openxmlformats.org/presentationml/2006/main" showMasterSp="0" type="tx">
-  <p:cSld name="Title, 2 Content and Content">
+  <p:cSld name="Titel, zwei Inhalte und Inhalt">
     <p:spTree>
       <p:nvGrpSpPr>
         <p:cNvPr id="1" name=""/>
@@ -4705,8 +1337,10 @@
           <a:lstStyle/>
           <a:p>
             <a:r>
-              <a:t>Titeltext</a:t>
+              <a:rPr lang="de-DE"/>
+              <a:t>Mastertitelformat bearbeiten</a:t>
             </a:r>
+            <a:endParaRPr/>
           </a:p>
         </p:txBody>
       </p:sp>
@@ -4722,8 +1356,8 @@
         </p:nvSpPr>
         <p:spPr>
           <a:xfrm>
-            <a:off x="923883" y="2012401"/>
-            <a:ext cx="5658550" cy="2287801"/>
+            <a:off x="6861422" y="2216890"/>
+            <a:ext cx="5658550" cy="4446800"/>
           </a:xfrm>
           <a:prstGeom prst="rect">
             <a:avLst/>
@@ -4735,33 +1369,40 @@
           </a:bodyPr>
           <a:lstStyle/>
           <a:p>
+            <a:pPr lvl="0"/>
             <a:r>
-              <a:t>Textebene 1</a:t>
+              <a:rPr lang="de-DE" dirty="0"/>
+              <a:t>Mastertextformat bearbeiten</a:t>
             </a:r>
           </a:p>
           <a:p>
             <a:pPr lvl="1"/>
             <a:r>
-              <a:t>Textebene 2</a:t>
+              <a:rPr lang="de-DE" dirty="0"/>
+              <a:t>Zweite Ebene</a:t>
             </a:r>
           </a:p>
           <a:p>
             <a:pPr lvl="2"/>
             <a:r>
-              <a:t>Textebene 3</a:t>
+              <a:rPr lang="de-DE" dirty="0"/>
+              <a:t>Dritte Ebene</a:t>
             </a:r>
           </a:p>
           <a:p>
             <a:pPr lvl="3"/>
             <a:r>
-              <a:t>Textebene 4</a:t>
+              <a:rPr lang="de-DE" dirty="0"/>
+              <a:t>Vierte Ebene</a:t>
             </a:r>
           </a:p>
           <a:p>
             <a:pPr lvl="4"/>
             <a:r>
-              <a:t>Textebene 5</a:t>
+              <a:rPr lang="de-DE" dirty="0"/>
+              <a:t>Fünfte Ebene</a:t>
             </a:r>
+            <a:endParaRPr dirty="0"/>
           </a:p>
         </p:txBody>
       </p:sp>
@@ -4907,8 +1548,10 @@
           <a:lstStyle/>
           <a:p>
             <a:r>
-              <a:t>Titeltext</a:t>
+              <a:rPr lang="de-DE"/>
+              <a:t>Mastertitelformat bearbeiten</a:t>
             </a:r>
+            <a:endParaRPr/>
           </a:p>
         </p:txBody>
       </p:sp>
@@ -4924,8 +1567,8 @@
         </p:nvSpPr>
         <p:spPr>
           <a:xfrm>
-            <a:off x="923883" y="2012401"/>
-            <a:ext cx="5658550" cy="4796281"/>
+            <a:off x="923883" y="2296900"/>
+            <a:ext cx="5658550" cy="4511782"/>
           </a:xfrm>
           <a:prstGeom prst="rect">
             <a:avLst/>
@@ -4937,645 +1580,46 @@
           </a:bodyPr>
           <a:lstStyle/>
           <a:p>
+            <a:pPr lvl="0"/>
             <a:r>
-              <a:t>Textebene 1</a:t>
+              <a:rPr lang="de-DE" dirty="0"/>
+              <a:t>Mastertextformat bearbeiten</a:t>
             </a:r>
           </a:p>
           <a:p>
             <a:pPr lvl="1"/>
             <a:r>
-              <a:t>Textebene 2</a:t>
+              <a:rPr lang="de-DE" dirty="0"/>
+              <a:t>Zweite Ebene</a:t>
             </a:r>
           </a:p>
           <a:p>
             <a:pPr lvl="2"/>
             <a:r>
-              <a:t>Textebene 3</a:t>
+              <a:rPr lang="de-DE" dirty="0"/>
+              <a:t>Dritte Ebene</a:t>
             </a:r>
           </a:p>
           <a:p>
             <a:pPr lvl="3"/>
             <a:r>
-              <a:t>Textebene 4</a:t>
+              <a:rPr lang="de-DE" dirty="0"/>
+              <a:t>Vierte Ebene</a:t>
             </a:r>
           </a:p>
           <a:p>
             <a:pPr lvl="4"/>
             <a:r>
-              <a:t>Textebene 5</a:t>
+              <a:rPr lang="de-DE" dirty="0"/>
+              <a:t>Fünfte Ebene</a:t>
             </a:r>
+            <a:endParaRPr dirty="0"/>
           </a:p>
         </p:txBody>
       </p:sp>
       <p:sp>
         <p:nvSpPr>
           <p:cNvPr id="88" name="Foliennummer"/>
-          <p:cNvSpPr txBox="1">
-            <a:spLocks noGrp="1"/>
-          </p:cNvSpPr>
-          <p:nvPr>
-            <p:ph type="sldNum" sz="quarter" idx="2"/>
-          </p:nvPr>
-        </p:nvSpPr>
-        <p:spPr>
-          <a:prstGeom prst="rect">
-            <a:avLst/>
-          </a:prstGeom>
-        </p:spPr>
-        <p:txBody>
-          <a:bodyPr/>
-          <a:lstStyle/>
-          <a:p>
-            <a:fld id="{86CB4B4D-7CA3-9044-876B-883B54F8677D}" type="slidenum">
-              <a:t>‹Nr.›</a:t>
-            </a:fld>
-            <a:endParaRPr/>
-          </a:p>
-        </p:txBody>
-      </p:sp>
-    </p:spTree>
-  </p:cSld>
-  <p:clrMapOvr>
-    <a:masterClrMapping/>
-  </p:clrMapOvr>
-  <p:transition spd="med"/>
-</p:sldLayout>
-</file>
-
-<file path=ppt/slideLayouts/slideLayout7.xml><?xml version="1.0" encoding="utf-8"?>
-<p:sldLayout xmlns:a="http://schemas.openxmlformats.org/drawingml/2006/main" xmlns:r="http://schemas.openxmlformats.org/officeDocument/2006/relationships" xmlns:p="http://schemas.openxmlformats.org/presentationml/2006/main" showMasterSp="0" type="tx">
-  <p:cSld name="Title, 2 Content over Content">
-    <p:spTree>
-      <p:nvGrpSpPr>
-        <p:cNvPr id="1" name=""/>
-        <p:cNvGrpSpPr/>
-        <p:nvPr/>
-      </p:nvGrpSpPr>
-      <p:grpSpPr>
-        <a:xfrm>
-          <a:off x="0" y="0"/>
-          <a:ext cx="0" cy="0"/>
-          <a:chOff x="0" y="0"/>
-          <a:chExt cx="0" cy="0"/>
-        </a:xfrm>
-      </p:grpSpPr>
-      <p:sp>
-        <p:nvSpPr>
-          <p:cNvPr id="95" name="Rechteck 7"/>
-          <p:cNvSpPr/>
-          <p:nvPr/>
-        </p:nvSpPr>
-        <p:spPr>
-          <a:xfrm>
-            <a:off x="0" y="5259600"/>
-            <a:ext cx="13444816" cy="2299681"/>
-          </a:xfrm>
-          <a:prstGeom prst="rect">
-            <a:avLst/>
-          </a:prstGeom>
-          <a:gradFill>
-            <a:gsLst>
-              <a:gs pos="0">
-                <a:srgbClr val="FFDB89"/>
-              </a:gs>
-              <a:gs pos="100000">
-                <a:srgbClr val="FFFFFF"/>
-              </a:gs>
-            </a:gsLst>
-            <a:lin ang="16200000"/>
-          </a:gradFill>
-          <a:ln w="12700">
-            <a:miter lim="400000"/>
-          </a:ln>
-        </p:spPr>
-        <p:txBody>
-          <a:bodyPr lIns="0" tIns="0" rIns="0" bIns="0"/>
-          <a:lstStyle/>
-          <a:p>
-            <a:endParaRPr sz="1800"/>
-          </a:p>
-        </p:txBody>
-      </p:sp>
-      <p:pic>
-        <p:nvPicPr>
-          <p:cNvPr id="96" name="Grafik 9" descr="Grafik 9"/>
-          <p:cNvPicPr>
-            <a:picLocks noChangeAspect="1"/>
-          </p:cNvPicPr>
-          <p:nvPr/>
-        </p:nvPicPr>
-        <p:blipFill>
-          <a:blip r:embed="rId2"/>
-          <a:stretch>
-            <a:fillRect/>
-          </a:stretch>
-        </p:blipFill>
-        <p:spPr>
-          <a:xfrm>
-            <a:off x="9123595" y="257040"/>
-            <a:ext cx="4127707" cy="1568520"/>
-          </a:xfrm>
-          <a:prstGeom prst="rect">
-            <a:avLst/>
-          </a:prstGeom>
-          <a:ln w="12700">
-            <a:miter lim="400000"/>
-          </a:ln>
-        </p:spPr>
-      </p:pic>
-      <p:sp>
-        <p:nvSpPr>
-          <p:cNvPr id="97" name="Titeltext"/>
-          <p:cNvSpPr txBox="1">
-            <a:spLocks noGrp="1"/>
-          </p:cNvSpPr>
-          <p:nvPr>
-            <p:ph type="title"/>
-          </p:nvPr>
-        </p:nvSpPr>
-        <p:spPr>
-          <a:xfrm>
-            <a:off x="923883" y="402120"/>
-            <a:ext cx="11596089" cy="1460881"/>
-          </a:xfrm>
-          <a:prstGeom prst="rect">
-            <a:avLst/>
-          </a:prstGeom>
-        </p:spPr>
-        <p:txBody>
-          <a:bodyPr lIns="0" tIns="0" rIns="0" bIns="0">
-            <a:normAutofit/>
-          </a:bodyPr>
-          <a:lstStyle/>
-          <a:p>
-            <a:r>
-              <a:t>Titeltext</a:t>
-            </a:r>
-          </a:p>
-        </p:txBody>
-      </p:sp>
-      <p:sp>
-        <p:nvSpPr>
-          <p:cNvPr id="98" name="Textebene 1…"/>
-          <p:cNvSpPr txBox="1">
-            <a:spLocks noGrp="1"/>
-          </p:cNvSpPr>
-          <p:nvPr>
-            <p:ph type="body" sz="quarter" idx="1"/>
-          </p:nvPr>
-        </p:nvSpPr>
-        <p:spPr>
-          <a:xfrm>
-            <a:off x="923883" y="2012401"/>
-            <a:ext cx="5658550" cy="2287801"/>
-          </a:xfrm>
-          <a:prstGeom prst="rect">
-            <a:avLst/>
-          </a:prstGeom>
-        </p:spPr>
-        <p:txBody>
-          <a:bodyPr lIns="0" tIns="0" rIns="0" bIns="0">
-            <a:normAutofit/>
-          </a:bodyPr>
-          <a:lstStyle/>
-          <a:p>
-            <a:r>
-              <a:t>Textebene 1</a:t>
-            </a:r>
-          </a:p>
-          <a:p>
-            <a:pPr lvl="1"/>
-            <a:r>
-              <a:t>Textebene 2</a:t>
-            </a:r>
-          </a:p>
-          <a:p>
-            <a:pPr lvl="2"/>
-            <a:r>
-              <a:t>Textebene 3</a:t>
-            </a:r>
-          </a:p>
-          <a:p>
-            <a:pPr lvl="3"/>
-            <a:r>
-              <a:t>Textebene 4</a:t>
-            </a:r>
-          </a:p>
-          <a:p>
-            <a:pPr lvl="4"/>
-            <a:r>
-              <a:t>Textebene 5</a:t>
-            </a:r>
-          </a:p>
-        </p:txBody>
-      </p:sp>
-      <p:sp>
-        <p:nvSpPr>
-          <p:cNvPr id="99" name="Foliennummer"/>
-          <p:cNvSpPr txBox="1">
-            <a:spLocks noGrp="1"/>
-          </p:cNvSpPr>
-          <p:nvPr>
-            <p:ph type="sldNum" sz="quarter" idx="2"/>
-          </p:nvPr>
-        </p:nvSpPr>
-        <p:spPr>
-          <a:prstGeom prst="rect">
-            <a:avLst/>
-          </a:prstGeom>
-        </p:spPr>
-        <p:txBody>
-          <a:bodyPr/>
-          <a:lstStyle/>
-          <a:p>
-            <a:fld id="{86CB4B4D-7CA3-9044-876B-883B54F8677D}" type="slidenum">
-              <a:t>‹Nr.›</a:t>
-            </a:fld>
-            <a:endParaRPr/>
-          </a:p>
-        </p:txBody>
-      </p:sp>
-    </p:spTree>
-  </p:cSld>
-  <p:clrMapOvr>
-    <a:masterClrMapping/>
-  </p:clrMapOvr>
-  <p:transition spd="med"/>
-</p:sldLayout>
-</file>
-
-<file path=ppt/slideLayouts/slideLayout8.xml><?xml version="1.0" encoding="utf-8"?>
-<p:sldLayout xmlns:a="http://schemas.openxmlformats.org/drawingml/2006/main" xmlns:r="http://schemas.openxmlformats.org/officeDocument/2006/relationships" xmlns:p="http://schemas.openxmlformats.org/presentationml/2006/main" showMasterSp="0" type="tx">
-  <p:cSld name="Title, Content over Content">
-    <p:spTree>
-      <p:nvGrpSpPr>
-        <p:cNvPr id="1" name=""/>
-        <p:cNvGrpSpPr/>
-        <p:nvPr/>
-      </p:nvGrpSpPr>
-      <p:grpSpPr>
-        <a:xfrm>
-          <a:off x="0" y="0"/>
-          <a:ext cx="0" cy="0"/>
-          <a:chOff x="0" y="0"/>
-          <a:chExt cx="0" cy="0"/>
-        </a:xfrm>
-      </p:grpSpPr>
-      <p:sp>
-        <p:nvSpPr>
-          <p:cNvPr id="106" name="Rechteck 7"/>
-          <p:cNvSpPr/>
-          <p:nvPr/>
-        </p:nvSpPr>
-        <p:spPr>
-          <a:xfrm>
-            <a:off x="0" y="5259600"/>
-            <a:ext cx="13444816" cy="2299681"/>
-          </a:xfrm>
-          <a:prstGeom prst="rect">
-            <a:avLst/>
-          </a:prstGeom>
-          <a:gradFill>
-            <a:gsLst>
-              <a:gs pos="0">
-                <a:srgbClr val="FFDB89"/>
-              </a:gs>
-              <a:gs pos="100000">
-                <a:srgbClr val="FFFFFF"/>
-              </a:gs>
-            </a:gsLst>
-            <a:lin ang="16200000"/>
-          </a:gradFill>
-          <a:ln w="12700">
-            <a:miter lim="400000"/>
-          </a:ln>
-        </p:spPr>
-        <p:txBody>
-          <a:bodyPr lIns="0" tIns="0" rIns="0" bIns="0"/>
-          <a:lstStyle/>
-          <a:p>
-            <a:endParaRPr sz="1800"/>
-          </a:p>
-        </p:txBody>
-      </p:sp>
-      <p:pic>
-        <p:nvPicPr>
-          <p:cNvPr id="107" name="Grafik 9" descr="Grafik 9"/>
-          <p:cNvPicPr>
-            <a:picLocks noChangeAspect="1"/>
-          </p:cNvPicPr>
-          <p:nvPr/>
-        </p:nvPicPr>
-        <p:blipFill>
-          <a:blip r:embed="rId2"/>
-          <a:stretch>
-            <a:fillRect/>
-          </a:stretch>
-        </p:blipFill>
-        <p:spPr>
-          <a:xfrm>
-            <a:off x="9123595" y="257040"/>
-            <a:ext cx="4127707" cy="1568520"/>
-          </a:xfrm>
-          <a:prstGeom prst="rect">
-            <a:avLst/>
-          </a:prstGeom>
-          <a:ln w="12700">
-            <a:miter lim="400000"/>
-          </a:ln>
-        </p:spPr>
-      </p:pic>
-      <p:sp>
-        <p:nvSpPr>
-          <p:cNvPr id="108" name="Titeltext"/>
-          <p:cNvSpPr txBox="1">
-            <a:spLocks noGrp="1"/>
-          </p:cNvSpPr>
-          <p:nvPr>
-            <p:ph type="title"/>
-          </p:nvPr>
-        </p:nvSpPr>
-        <p:spPr>
-          <a:xfrm>
-            <a:off x="923883" y="402120"/>
-            <a:ext cx="11596089" cy="1460881"/>
-          </a:xfrm>
-          <a:prstGeom prst="rect">
-            <a:avLst/>
-          </a:prstGeom>
-        </p:spPr>
-        <p:txBody>
-          <a:bodyPr lIns="0" tIns="0" rIns="0" bIns="0">
-            <a:normAutofit/>
-          </a:bodyPr>
-          <a:lstStyle/>
-          <a:p>
-            <a:r>
-              <a:t>Titeltext</a:t>
-            </a:r>
-          </a:p>
-        </p:txBody>
-      </p:sp>
-      <p:sp>
-        <p:nvSpPr>
-          <p:cNvPr id="109" name="Textebene 1…"/>
-          <p:cNvSpPr txBox="1">
-            <a:spLocks noGrp="1"/>
-          </p:cNvSpPr>
-          <p:nvPr>
-            <p:ph type="body" sz="half" idx="1"/>
-          </p:nvPr>
-        </p:nvSpPr>
-        <p:spPr>
-          <a:xfrm>
-            <a:off x="923883" y="2012401"/>
-            <a:ext cx="11596089" cy="2287801"/>
-          </a:xfrm>
-          <a:prstGeom prst="rect">
-            <a:avLst/>
-          </a:prstGeom>
-        </p:spPr>
-        <p:txBody>
-          <a:bodyPr lIns="0" tIns="0" rIns="0" bIns="0">
-            <a:normAutofit/>
-          </a:bodyPr>
-          <a:lstStyle/>
-          <a:p>
-            <a:r>
-              <a:t>Textebene 1</a:t>
-            </a:r>
-          </a:p>
-          <a:p>
-            <a:pPr lvl="1"/>
-            <a:r>
-              <a:t>Textebene 2</a:t>
-            </a:r>
-          </a:p>
-          <a:p>
-            <a:pPr lvl="2"/>
-            <a:r>
-              <a:t>Textebene 3</a:t>
-            </a:r>
-          </a:p>
-          <a:p>
-            <a:pPr lvl="3"/>
-            <a:r>
-              <a:t>Textebene 4</a:t>
-            </a:r>
-          </a:p>
-          <a:p>
-            <a:pPr lvl="4"/>
-            <a:r>
-              <a:t>Textebene 5</a:t>
-            </a:r>
-          </a:p>
-        </p:txBody>
-      </p:sp>
-      <p:sp>
-        <p:nvSpPr>
-          <p:cNvPr id="110" name="Foliennummer"/>
-          <p:cNvSpPr txBox="1">
-            <a:spLocks noGrp="1"/>
-          </p:cNvSpPr>
-          <p:nvPr>
-            <p:ph type="sldNum" sz="quarter" idx="2"/>
-          </p:nvPr>
-        </p:nvSpPr>
-        <p:spPr>
-          <a:prstGeom prst="rect">
-            <a:avLst/>
-          </a:prstGeom>
-        </p:spPr>
-        <p:txBody>
-          <a:bodyPr/>
-          <a:lstStyle/>
-          <a:p>
-            <a:fld id="{86CB4B4D-7CA3-9044-876B-883B54F8677D}" type="slidenum">
-              <a:t>‹Nr.›</a:t>
-            </a:fld>
-            <a:endParaRPr/>
-          </a:p>
-        </p:txBody>
-      </p:sp>
-    </p:spTree>
-  </p:cSld>
-  <p:clrMapOvr>
-    <a:masterClrMapping/>
-  </p:clrMapOvr>
-  <p:transition spd="med"/>
-</p:sldLayout>
-</file>
-
-<file path=ppt/slideLayouts/slideLayout9.xml><?xml version="1.0" encoding="utf-8"?>
-<p:sldLayout xmlns:a="http://schemas.openxmlformats.org/drawingml/2006/main" xmlns:r="http://schemas.openxmlformats.org/officeDocument/2006/relationships" xmlns:p="http://schemas.openxmlformats.org/presentationml/2006/main" showMasterSp="0" type="tx">
-  <p:cSld name="Title, 4 Content">
-    <p:spTree>
-      <p:nvGrpSpPr>
-        <p:cNvPr id="1" name=""/>
-        <p:cNvGrpSpPr/>
-        <p:nvPr/>
-      </p:nvGrpSpPr>
-      <p:grpSpPr>
-        <a:xfrm>
-          <a:off x="0" y="0"/>
-          <a:ext cx="0" cy="0"/>
-          <a:chOff x="0" y="0"/>
-          <a:chExt cx="0" cy="0"/>
-        </a:xfrm>
-      </p:grpSpPr>
-      <p:sp>
-        <p:nvSpPr>
-          <p:cNvPr id="117" name="Rechteck 7"/>
-          <p:cNvSpPr/>
-          <p:nvPr/>
-        </p:nvSpPr>
-        <p:spPr>
-          <a:xfrm>
-            <a:off x="0" y="5259600"/>
-            <a:ext cx="13444816" cy="2299681"/>
-          </a:xfrm>
-          <a:prstGeom prst="rect">
-            <a:avLst/>
-          </a:prstGeom>
-          <a:gradFill>
-            <a:gsLst>
-              <a:gs pos="0">
-                <a:srgbClr val="FFDB89"/>
-              </a:gs>
-              <a:gs pos="100000">
-                <a:srgbClr val="FFFFFF"/>
-              </a:gs>
-            </a:gsLst>
-            <a:lin ang="16200000"/>
-          </a:gradFill>
-          <a:ln w="12700">
-            <a:miter lim="400000"/>
-          </a:ln>
-        </p:spPr>
-        <p:txBody>
-          <a:bodyPr lIns="0" tIns="0" rIns="0" bIns="0"/>
-          <a:lstStyle/>
-          <a:p>
-            <a:endParaRPr sz="1800"/>
-          </a:p>
-        </p:txBody>
-      </p:sp>
-      <p:pic>
-        <p:nvPicPr>
-          <p:cNvPr id="118" name="Grafik 9" descr="Grafik 9"/>
-          <p:cNvPicPr>
-            <a:picLocks noChangeAspect="1"/>
-          </p:cNvPicPr>
-          <p:nvPr/>
-        </p:nvPicPr>
-        <p:blipFill>
-          <a:blip r:embed="rId2"/>
-          <a:stretch>
-            <a:fillRect/>
-          </a:stretch>
-        </p:blipFill>
-        <p:spPr>
-          <a:xfrm>
-            <a:off x="9123595" y="257040"/>
-            <a:ext cx="4127707" cy="1568520"/>
-          </a:xfrm>
-          <a:prstGeom prst="rect">
-            <a:avLst/>
-          </a:prstGeom>
-          <a:ln w="12700">
-            <a:miter lim="400000"/>
-          </a:ln>
-        </p:spPr>
-      </p:pic>
-      <p:sp>
-        <p:nvSpPr>
-          <p:cNvPr id="119" name="Titeltext"/>
-          <p:cNvSpPr txBox="1">
-            <a:spLocks noGrp="1"/>
-          </p:cNvSpPr>
-          <p:nvPr>
-            <p:ph type="title"/>
-          </p:nvPr>
-        </p:nvSpPr>
-        <p:spPr>
-          <a:xfrm>
-            <a:off x="923883" y="402120"/>
-            <a:ext cx="11596089" cy="1460881"/>
-          </a:xfrm>
-          <a:prstGeom prst="rect">
-            <a:avLst/>
-          </a:prstGeom>
-        </p:spPr>
-        <p:txBody>
-          <a:bodyPr lIns="0" tIns="0" rIns="0" bIns="0">
-            <a:normAutofit/>
-          </a:bodyPr>
-          <a:lstStyle/>
-          <a:p>
-            <a:r>
-              <a:t>Titeltext</a:t>
-            </a:r>
-          </a:p>
-        </p:txBody>
-      </p:sp>
-      <p:sp>
-        <p:nvSpPr>
-          <p:cNvPr id="120" name="Textebene 1…"/>
-          <p:cNvSpPr txBox="1">
-            <a:spLocks noGrp="1"/>
-          </p:cNvSpPr>
-          <p:nvPr>
-            <p:ph type="body" sz="quarter" idx="1"/>
-          </p:nvPr>
-        </p:nvSpPr>
-        <p:spPr>
-          <a:xfrm>
-            <a:off x="923883" y="2012401"/>
-            <a:ext cx="5658550" cy="2287801"/>
-          </a:xfrm>
-          <a:prstGeom prst="rect">
-            <a:avLst/>
-          </a:prstGeom>
-        </p:spPr>
-        <p:txBody>
-          <a:bodyPr lIns="0" tIns="0" rIns="0" bIns="0">
-            <a:normAutofit/>
-          </a:bodyPr>
-          <a:lstStyle/>
-          <a:p>
-            <a:r>
-              <a:t>Textebene 1</a:t>
-            </a:r>
-          </a:p>
-          <a:p>
-            <a:pPr lvl="1"/>
-            <a:r>
-              <a:t>Textebene 2</a:t>
-            </a:r>
-          </a:p>
-          <a:p>
-            <a:pPr lvl="2"/>
-            <a:r>
-              <a:t>Textebene 3</a:t>
-            </a:r>
-          </a:p>
-          <a:p>
-            <a:pPr lvl="3"/>
-            <a:r>
-              <a:t>Textebene 4</a:t>
-            </a:r>
-          </a:p>
-          <a:p>
-            <a:pPr lvl="4"/>
-            <a:r>
-              <a:t>Textebene 5</a:t>
-            </a:r>
-          </a:p>
-        </p:txBody>
-      </p:sp>
-      <p:sp>
-        <p:nvSpPr>
-          <p:cNvPr id="121" name="Foliennummer"/>
           <p:cNvSpPr txBox="1">
             <a:spLocks noGrp="1"/>
           </p:cNvSpPr>
@@ -5679,7 +1723,7 @@
           <p:nvPr/>
         </p:nvPicPr>
         <p:blipFill>
-          <a:blip r:embed="rId23"/>
+          <a:blip r:embed="rId8"/>
           <a:stretch>
             <a:fillRect/>
           </a:stretch>
@@ -5729,8 +1773,10 @@
           <a:lstStyle/>
           <a:p>
             <a:r>
+              <a:rPr dirty="0" err="1"/>
               <a:t>Titeltext</a:t>
             </a:r>
+            <a:endParaRPr dirty="0"/>
           </a:p>
         </p:txBody>
       </p:sp>
@@ -5746,8 +1792,8 @@
         </p:nvSpPr>
         <p:spPr>
           <a:xfrm>
-            <a:off x="671672" y="1763184"/>
-            <a:ext cx="12090084" cy="5793317"/>
+            <a:off x="671672" y="2103120"/>
+            <a:ext cx="12090084" cy="4966481"/>
           </a:xfrm>
           <a:prstGeom prst="rect">
             <a:avLst/>
@@ -5766,31 +1812,56 @@
           <a:lstStyle/>
           <a:p>
             <a:r>
-              <a:t>Textebene 1</a:t>
+              <a:rPr dirty="0" err="1"/>
+              <a:t>Textebene</a:t>
+            </a:r>
+            <a:r>
+              <a:rPr dirty="0"/>
+              <a:t> 1</a:t>
             </a:r>
           </a:p>
           <a:p>
             <a:pPr lvl="1"/>
             <a:r>
-              <a:t>Textebene 2</a:t>
+              <a:rPr dirty="0" err="1"/>
+              <a:t>Textebene</a:t>
+            </a:r>
+            <a:r>
+              <a:rPr dirty="0"/>
+              <a:t> 2</a:t>
             </a:r>
           </a:p>
           <a:p>
             <a:pPr lvl="2"/>
             <a:r>
-              <a:t>Textebene 3</a:t>
+              <a:rPr dirty="0" err="1"/>
+              <a:t>Textebene</a:t>
+            </a:r>
+            <a:r>
+              <a:rPr dirty="0"/>
+              <a:t> 3</a:t>
             </a:r>
           </a:p>
           <a:p>
             <a:pPr lvl="3"/>
             <a:r>
-              <a:t>Textebene 4</a:t>
+              <a:rPr dirty="0" err="1"/>
+              <a:t>Textebene</a:t>
+            </a:r>
+            <a:r>
+              <a:rPr dirty="0"/>
+              <a:t> 4</a:t>
             </a:r>
           </a:p>
           <a:p>
             <a:pPr lvl="4"/>
             <a:r>
-              <a:t>Textebene 5</a:t>
+              <a:rPr dirty="0" err="1"/>
+              <a:t>Textebene</a:t>
+            </a:r>
+            <a:r>
+              <a:rPr dirty="0"/>
+              <a:t> 5</a:t>
             </a:r>
           </a:p>
         </p:txBody>
@@ -5852,26 +1923,11 @@
     <p:sldLayoutId id="2147483654" r:id="rId4"/>
     <p:sldLayoutId id="2147483655" r:id="rId5"/>
     <p:sldLayoutId id="2147483656" r:id="rId6"/>
-    <p:sldLayoutId id="2147483657" r:id="rId7"/>
-    <p:sldLayoutId id="2147483658" r:id="rId8"/>
-    <p:sldLayoutId id="2147483659" r:id="rId9"/>
-    <p:sldLayoutId id="2147483660" r:id="rId10"/>
-    <p:sldLayoutId id="2147483662" r:id="rId11"/>
-    <p:sldLayoutId id="2147483663" r:id="rId12"/>
-    <p:sldLayoutId id="2147483664" r:id="rId13"/>
-    <p:sldLayoutId id="2147483665" r:id="rId14"/>
-    <p:sldLayoutId id="2147483666" r:id="rId15"/>
-    <p:sldLayoutId id="2147483667" r:id="rId16"/>
-    <p:sldLayoutId id="2147483668" r:id="rId17"/>
-    <p:sldLayoutId id="2147483669" r:id="rId18"/>
-    <p:sldLayoutId id="2147483670" r:id="rId19"/>
-    <p:sldLayoutId id="2147483671" r:id="rId20"/>
-    <p:sldLayoutId id="2147483672" r:id="rId21"/>
   </p:sldLayoutIdLst>
   <p:transition spd="med"/>
   <p:txStyles>
     <p:titleStyle>
-      <a:lvl1pPr marL="0" marR="0" indent="0" algn="l" defTabSz="914400" rtl="0" latinLnBrk="0">
+      <a:lvl1pPr marL="0" marR="0" indent="0" algn="l" defTabSz="914400" rtl="0" eaLnBrk="1" latinLnBrk="0" hangingPunct="1">
         <a:lnSpc>
           <a:spcPct val="90000"/>
         </a:lnSpc>
@@ -5886,18 +1942,18 @@
         <a:buFontTx/>
         <a:buNone/>
         <a:tabLst/>
-        <a:defRPr sz="4400" b="0" i="0" u="none" strike="noStrike" cap="none" spc="-1" baseline="0">
+        <a:defRPr sz="4400" b="1" i="0" u="none" strike="noStrike" cap="none" spc="-1" baseline="0">
           <a:solidFill>
             <a:srgbClr val="000000"/>
           </a:solidFill>
           <a:uFillTx/>
-          <a:latin typeface="Calibri Light"/>
-          <a:ea typeface="Calibri Light"/>
-          <a:cs typeface="Calibri Light"/>
+          <a:latin typeface="Calibri" panose="020F0502020204030204" pitchFamily="34" charset="0"/>
+          <a:ea typeface="Calibri" panose="020F0502020204030204" pitchFamily="34" charset="0"/>
+          <a:cs typeface="Calibri" panose="020F0502020204030204" pitchFamily="34" charset="0"/>
           <a:sym typeface="Calibri Light"/>
         </a:defRPr>
       </a:lvl1pPr>
-      <a:lvl2pPr marL="0" marR="0" indent="0" algn="l" defTabSz="914400" rtl="0" latinLnBrk="0">
+      <a:lvl2pPr marL="0" marR="0" indent="0" algn="l" defTabSz="914400" rtl="0" eaLnBrk="1" latinLnBrk="0" hangingPunct="1">
         <a:lnSpc>
           <a:spcPct val="90000"/>
         </a:lnSpc>
@@ -5923,7 +1979,7 @@
           <a:sym typeface="Calibri Light"/>
         </a:defRPr>
       </a:lvl2pPr>
-      <a:lvl3pPr marL="0" marR="0" indent="0" algn="l" defTabSz="914400" rtl="0" latinLnBrk="0">
+      <a:lvl3pPr marL="0" marR="0" indent="0" algn="l" defTabSz="914400" rtl="0" eaLnBrk="1" latinLnBrk="0" hangingPunct="1">
         <a:lnSpc>
           <a:spcPct val="90000"/>
         </a:lnSpc>
@@ -5949,7 +2005,7 @@
           <a:sym typeface="Calibri Light"/>
         </a:defRPr>
       </a:lvl3pPr>
-      <a:lvl4pPr marL="0" marR="0" indent="0" algn="l" defTabSz="914400" rtl="0" latinLnBrk="0">
+      <a:lvl4pPr marL="0" marR="0" indent="0" algn="l" defTabSz="914400" rtl="0" eaLnBrk="1" latinLnBrk="0" hangingPunct="1">
         <a:lnSpc>
           <a:spcPct val="90000"/>
         </a:lnSpc>
@@ -5975,7 +2031,7 @@
           <a:sym typeface="Calibri Light"/>
         </a:defRPr>
       </a:lvl4pPr>
-      <a:lvl5pPr marL="0" marR="0" indent="0" algn="l" defTabSz="914400" rtl="0" latinLnBrk="0">
+      <a:lvl5pPr marL="0" marR="0" indent="0" algn="l" defTabSz="914400" rtl="0" eaLnBrk="1" latinLnBrk="0" hangingPunct="1">
         <a:lnSpc>
           <a:spcPct val="90000"/>
         </a:lnSpc>
@@ -6001,7 +2057,7 @@
           <a:sym typeface="Calibri Light"/>
         </a:defRPr>
       </a:lvl5pPr>
-      <a:lvl6pPr marL="0" marR="0" indent="0" algn="l" defTabSz="914400" rtl="0" latinLnBrk="0">
+      <a:lvl6pPr marL="0" marR="0" indent="0" algn="l" defTabSz="914400" rtl="0" eaLnBrk="1" latinLnBrk="0" hangingPunct="1">
         <a:lnSpc>
           <a:spcPct val="90000"/>
         </a:lnSpc>
@@ -6027,7 +2083,7 @@
           <a:sym typeface="Calibri Light"/>
         </a:defRPr>
       </a:lvl6pPr>
-      <a:lvl7pPr marL="0" marR="0" indent="0" algn="l" defTabSz="914400" rtl="0" latinLnBrk="0">
+      <a:lvl7pPr marL="0" marR="0" indent="0" algn="l" defTabSz="914400" rtl="0" eaLnBrk="1" latinLnBrk="0" hangingPunct="1">
         <a:lnSpc>
           <a:spcPct val="90000"/>
         </a:lnSpc>
@@ -6053,7 +2109,7 @@
           <a:sym typeface="Calibri Light"/>
         </a:defRPr>
       </a:lvl7pPr>
-      <a:lvl8pPr marL="0" marR="0" indent="0" algn="l" defTabSz="914400" rtl="0" latinLnBrk="0">
+      <a:lvl8pPr marL="0" marR="0" indent="0" algn="l" defTabSz="914400" rtl="0" eaLnBrk="1" latinLnBrk="0" hangingPunct="1">
         <a:lnSpc>
           <a:spcPct val="90000"/>
         </a:lnSpc>
@@ -6079,7 +2135,7 @@
           <a:sym typeface="Calibri Light"/>
         </a:defRPr>
       </a:lvl8pPr>
-      <a:lvl9pPr marL="0" marR="0" indent="0" algn="l" defTabSz="914400" rtl="0" latinLnBrk="0">
+      <a:lvl9pPr marL="0" marR="0" indent="0" algn="l" defTabSz="914400" rtl="0" eaLnBrk="1" latinLnBrk="0" hangingPunct="1">
         <a:lnSpc>
           <a:spcPct val="90000"/>
         </a:lnSpc>
@@ -6107,7 +2163,7 @@
       </a:lvl9pPr>
     </p:titleStyle>
     <p:bodyStyle>
-      <a:lvl1pPr marL="228600" marR="0" indent="-228600" algn="l" defTabSz="914400" rtl="0" latinLnBrk="0">
+      <a:lvl1pPr marL="228600" marR="0" indent="-228600" algn="l" defTabSz="914400" rtl="0" eaLnBrk="1" latinLnBrk="0" hangingPunct="1">
         <a:lnSpc>
           <a:spcPct val="90000"/>
         </a:lnSpc>
@@ -6135,7 +2191,7 @@
           <a:sym typeface="Calibri"/>
         </a:defRPr>
       </a:lvl1pPr>
-      <a:lvl2pPr marL="723900" marR="0" indent="-266700" algn="l" defTabSz="914400" rtl="0" latinLnBrk="0">
+      <a:lvl2pPr marL="723900" marR="0" indent="-266700" algn="l" defTabSz="914400" rtl="0" eaLnBrk="1" latinLnBrk="0" hangingPunct="1">
         <a:lnSpc>
           <a:spcPct val="90000"/>
         </a:lnSpc>
@@ -6163,7 +2219,7 @@
           <a:sym typeface="Calibri"/>
         </a:defRPr>
       </a:lvl2pPr>
-      <a:lvl3pPr marL="1234439" marR="0" indent="-320039" algn="l" defTabSz="914400" rtl="0" latinLnBrk="0">
+      <a:lvl3pPr marL="1234439" marR="0" indent="-320039" algn="l" defTabSz="914400" rtl="0" eaLnBrk="1" latinLnBrk="0" hangingPunct="1">
         <a:lnSpc>
           <a:spcPct val="90000"/>
         </a:lnSpc>
@@ -6191,7 +2247,7 @@
           <a:sym typeface="Calibri"/>
         </a:defRPr>
       </a:lvl3pPr>
-      <a:lvl4pPr marL="1727200" marR="0" indent="-355600" algn="l" defTabSz="914400" rtl="0" latinLnBrk="0">
+      <a:lvl4pPr marL="1727200" marR="0" indent="-355600" algn="l" defTabSz="914400" rtl="0" eaLnBrk="1" latinLnBrk="0" hangingPunct="1">
         <a:lnSpc>
           <a:spcPct val="90000"/>
         </a:lnSpc>
@@ -6219,7 +2275,7 @@
           <a:sym typeface="Calibri"/>
         </a:defRPr>
       </a:lvl4pPr>
-      <a:lvl5pPr marL="2184400" marR="0" indent="-355600" algn="l" defTabSz="914400" rtl="0" latinLnBrk="0">
+      <a:lvl5pPr marL="2184400" marR="0" indent="-355600" algn="l" defTabSz="914400" rtl="0" eaLnBrk="1" latinLnBrk="0" hangingPunct="1">
         <a:lnSpc>
           <a:spcPct val="90000"/>
         </a:lnSpc>
@@ -6247,7 +2303,7 @@
           <a:sym typeface="Calibri"/>
         </a:defRPr>
       </a:lvl5pPr>
-      <a:lvl6pPr marL="0" marR="0" indent="0" algn="l" defTabSz="914400" rtl="0" latinLnBrk="0">
+      <a:lvl6pPr marL="0" marR="0" indent="0" algn="l" defTabSz="914400" rtl="0" eaLnBrk="1" latinLnBrk="0" hangingPunct="1">
         <a:lnSpc>
           <a:spcPct val="90000"/>
         </a:lnSpc>
@@ -6275,7 +2331,7 @@
           <a:sym typeface="Calibri"/>
         </a:defRPr>
       </a:lvl6pPr>
-      <a:lvl7pPr marL="0" marR="0" indent="0" algn="l" defTabSz="914400" rtl="0" latinLnBrk="0">
+      <a:lvl7pPr marL="0" marR="0" indent="0" algn="l" defTabSz="914400" rtl="0" eaLnBrk="1" latinLnBrk="0" hangingPunct="1">
         <a:lnSpc>
           <a:spcPct val="90000"/>
         </a:lnSpc>
@@ -6303,7 +2359,7 @@
           <a:sym typeface="Calibri"/>
         </a:defRPr>
       </a:lvl7pPr>
-      <a:lvl8pPr marL="0" marR="0" indent="0" algn="l" defTabSz="914400" rtl="0" latinLnBrk="0">
+      <a:lvl8pPr marL="0" marR="0" indent="0" algn="l" defTabSz="914400" rtl="0" eaLnBrk="1" latinLnBrk="0" hangingPunct="1">
         <a:lnSpc>
           <a:spcPct val="90000"/>
         </a:lnSpc>
@@ -6331,7 +2387,7 @@
           <a:sym typeface="Calibri"/>
         </a:defRPr>
       </a:lvl8pPr>
-      <a:lvl9pPr marL="0" marR="0" indent="0" algn="l" defTabSz="914400" rtl="0" latinLnBrk="0">
+      <a:lvl9pPr marL="0" marR="0" indent="0" algn="l" defTabSz="914400" rtl="0" eaLnBrk="1" latinLnBrk="0" hangingPunct="1">
         <a:lnSpc>
           <a:spcPct val="90000"/>
         </a:lnSpc>
@@ -6361,7 +2417,7 @@
       </a:lvl9pPr>
     </p:bodyStyle>
     <p:otherStyle>
-      <a:lvl1pPr marL="0" marR="0" indent="0" algn="r" defTabSz="914400" rtl="0" latinLnBrk="0">
+      <a:lvl1pPr marL="0" marR="0" indent="0" algn="r" defTabSz="914400" rtl="0" eaLnBrk="1" latinLnBrk="0" hangingPunct="1">
         <a:lnSpc>
           <a:spcPct val="100000"/>
         </a:lnSpc>
@@ -6387,7 +2443,7 @@
           <a:sym typeface="Calibri"/>
         </a:defRPr>
       </a:lvl1pPr>
-      <a:lvl2pPr marL="0" marR="0" indent="0" algn="r" defTabSz="914400" rtl="0" latinLnBrk="0">
+      <a:lvl2pPr marL="0" marR="0" indent="0" algn="r" defTabSz="914400" rtl="0" eaLnBrk="1" latinLnBrk="0" hangingPunct="1">
         <a:lnSpc>
           <a:spcPct val="100000"/>
         </a:lnSpc>
@@ -6413,7 +2469,7 @@
           <a:sym typeface="Calibri"/>
         </a:defRPr>
       </a:lvl2pPr>
-      <a:lvl3pPr marL="0" marR="0" indent="0" algn="r" defTabSz="914400" rtl="0" latinLnBrk="0">
+      <a:lvl3pPr marL="0" marR="0" indent="0" algn="r" defTabSz="914400" rtl="0" eaLnBrk="1" latinLnBrk="0" hangingPunct="1">
         <a:lnSpc>
           <a:spcPct val="100000"/>
         </a:lnSpc>
@@ -6439,7 +2495,7 @@
           <a:sym typeface="Calibri"/>
         </a:defRPr>
       </a:lvl3pPr>
-      <a:lvl4pPr marL="0" marR="0" indent="0" algn="r" defTabSz="914400" rtl="0" latinLnBrk="0">
+      <a:lvl4pPr marL="0" marR="0" indent="0" algn="r" defTabSz="914400" rtl="0" eaLnBrk="1" latinLnBrk="0" hangingPunct="1">
         <a:lnSpc>
           <a:spcPct val="100000"/>
         </a:lnSpc>
@@ -6465,7 +2521,7 @@
           <a:sym typeface="Calibri"/>
         </a:defRPr>
       </a:lvl4pPr>
-      <a:lvl5pPr marL="0" marR="0" indent="0" algn="r" defTabSz="914400" rtl="0" latinLnBrk="0">
+      <a:lvl5pPr marL="0" marR="0" indent="0" algn="r" defTabSz="914400" rtl="0" eaLnBrk="1" latinLnBrk="0" hangingPunct="1">
         <a:lnSpc>
           <a:spcPct val="100000"/>
         </a:lnSpc>
@@ -6491,7 +2547,7 @@
           <a:sym typeface="Calibri"/>
         </a:defRPr>
       </a:lvl5pPr>
-      <a:lvl6pPr marL="0" marR="0" indent="0" algn="r" defTabSz="914400" rtl="0" latinLnBrk="0">
+      <a:lvl6pPr marL="0" marR="0" indent="0" algn="r" defTabSz="914400" rtl="0" eaLnBrk="1" latinLnBrk="0" hangingPunct="1">
         <a:lnSpc>
           <a:spcPct val="100000"/>
         </a:lnSpc>
@@ -6517,7 +2573,7 @@
           <a:sym typeface="Calibri"/>
         </a:defRPr>
       </a:lvl6pPr>
-      <a:lvl7pPr marL="0" marR="0" indent="0" algn="r" defTabSz="914400" rtl="0" latinLnBrk="0">
+      <a:lvl7pPr marL="0" marR="0" indent="0" algn="r" defTabSz="914400" rtl="0" eaLnBrk="1" latinLnBrk="0" hangingPunct="1">
         <a:lnSpc>
           <a:spcPct val="100000"/>
         </a:lnSpc>
@@ -6543,7 +2599,7 @@
           <a:sym typeface="Calibri"/>
         </a:defRPr>
       </a:lvl7pPr>
-      <a:lvl8pPr marL="0" marR="0" indent="0" algn="r" defTabSz="914400" rtl="0" latinLnBrk="0">
+      <a:lvl8pPr marL="0" marR="0" indent="0" algn="r" defTabSz="914400" rtl="0" eaLnBrk="1" latinLnBrk="0" hangingPunct="1">
         <a:lnSpc>
           <a:spcPct val="100000"/>
         </a:lnSpc>
@@ -6569,7 +2625,7 @@
           <a:sym typeface="Calibri"/>
         </a:defRPr>
       </a:lvl8pPr>
-      <a:lvl9pPr marL="0" marR="0" indent="0" algn="r" defTabSz="914400" rtl="0" latinLnBrk="0">
+      <a:lvl9pPr marL="0" marR="0" indent="0" algn="r" defTabSz="914400" rtl="0" eaLnBrk="1" latinLnBrk="0" hangingPunct="1">
         <a:lnSpc>
           <a:spcPct val="100000"/>
         </a:lnSpc>
@@ -6691,7 +2747,7 @@
 </file>
 
 <file path=ppt/theme/theme1.xml><?xml version="1.0" encoding="utf-8"?>
-<a:theme xmlns:a="http://schemas.openxmlformats.org/drawingml/2006/main" name="Office Theme">
+<a:theme xmlns:a="http://schemas.openxmlformats.org/drawingml/2006/main" name="Office">
   <a:themeElements>
     <a:clrScheme name="Office Theme">
       <a:dk1>
@@ -7774,7 +3830,7 @@
   <a:extraClrSchemeLst/>
   <a:extLst>
     <a:ext uri="{05A4C25C-085E-4340-85A3-A5531E510DB2}">
-      <thm15:themeFamily xmlns:thm15="http://schemas.microsoft.com/office/thememl/2012/main" name="DiakonieKorkBasis " id="{99881443-9DC6-E940-A48E-DB42E8DCA9F4}" vid="{FB20343B-3615-9A48-AA54-5D9F7E87AF06}"/>
+      <thm15:themeFamily xmlns:thm15="http://schemas.microsoft.com/office/thememl/2012/main" name="Präsentation2" id="{5D750A66-3C37-D34C-B33C-9019E1744C91}" vid="{0D653DA6-197E-394B-B15A-FCAFBA3C3332}"/>
     </a:ext>
   </a:extLst>
 </a:theme>
